--- a/reports/Final_Project_Presentation.pptx
+++ b/reports/Final_Project_Presentation.pptx
@@ -4,18 +4,21 @@
   <p:sldMasterIdLst>
     <p:sldMasterId id="2147483648" r:id="rId1"/>
   </p:sldMasterIdLst>
+  <p:notesMasterIdLst>
+    <p:notesMasterId r:id="rId11"/>
+  </p:notesMasterIdLst>
   <p:sldIdLst>
-    <p:sldId id="256" r:id="rId7"/>
-    <p:sldId id="257" r:id="rId9"/>
-    <p:sldId id="258" r:id="rId10"/>
-    <p:sldId id="259" r:id="rId11"/>
-    <p:sldId id="260" r:id="rId12"/>
-    <p:sldId id="261" r:id="rId13"/>
-    <p:sldId id="262" r:id="rId14"/>
-    <p:sldId id="263" r:id="rId15"/>
-    <p:sldId id="264" r:id="rId16"/>
+    <p:sldId id="256" r:id="rId2"/>
+    <p:sldId id="257" r:id="rId3"/>
+    <p:sldId id="258" r:id="rId4"/>
+    <p:sldId id="268" r:id="rId5"/>
+    <p:sldId id="260" r:id="rId6"/>
+    <p:sldId id="261" r:id="rId7"/>
+    <p:sldId id="262" r:id="rId8"/>
+    <p:sldId id="263" r:id="rId9"/>
+    <p:sldId id="267" r:id="rId10"/>
   </p:sldIdLst>
-  <p:sldSz cx="12188952" cy="6858000" type="screen4x3"/>
+  <p:sldSz cx="12188825" cy="6858000"/>
   <p:notesSz cx="6858000" cy="9144000"/>
   <p:defaultTextStyle>
     <a:defPPr>
@@ -112,11 +115,27 @@
       </a:defRPr>
     </a:lvl9pPr>
   </p:defaultTextStyle>
+  <p:extLst>
+    <p:ext uri="{EFAFB233-063F-42B5-8137-9DF3F51BA10A}">
+      <p15:sldGuideLst xmlns:p15="http://schemas.microsoft.com/office/powerpoint/2012/main">
+        <p15:guide id="1" orient="horz" pos="2160">
+          <p15:clr>
+            <a:srgbClr val="A4A3A4"/>
+          </p15:clr>
+        </p15:guide>
+        <p15:guide id="2" pos="2880">
+          <p15:clr>
+            <a:srgbClr val="A4A3A4"/>
+          </p15:clr>
+        </p15:guide>
+      </p15:sldGuideLst>
+    </p:ext>
+  </p:extLst>
 </p:presentation>
 </file>
 
 <file path=ppt/notesMasters/notesMaster1.xml><?xml version="1.0" encoding="utf-8"?>
-<p:notesMaster xmlns:a="http://schemas.openxmlformats.org/drawingml/2006/main" xmlns:p="http://schemas.openxmlformats.org/presentationml/2006/main" xmlns:r="http://schemas.openxmlformats.org/officeDocument/2006/relationships">
+<p:notesMaster xmlns:a="http://schemas.openxmlformats.org/drawingml/2006/main" xmlns:r="http://schemas.openxmlformats.org/officeDocument/2006/relationships" xmlns:p="http://schemas.openxmlformats.org/presentationml/2006/main">
   <p:cSld>
     <p:bg>
       <p:bgRef idx="1001">
@@ -137,241 +156,16 @@
           <a:chExt cx="0" cy="0"/>
         </a:xfrm>
       </p:grpSpPr>
-      <p:sp>
-        <p:nvSpPr>
-          <p:cNvPr id="2" name="Header Placeholder 1"/>
-          <p:cNvSpPr>
-            <a:spLocks noGrp="1"/>
-          </p:cNvSpPr>
-          <p:nvPr>
-            <p:ph type="hdr" sz="quarter"/>
-          </p:nvPr>
-        </p:nvSpPr>
-        <p:spPr>
-          <a:xfrm>
-            <a:off x="0" y="0"/>
-            <a:ext cx="2971800" cy="457200"/>
-          </a:xfrm>
-          <a:prstGeom prst="rect">
-            <a:avLst/>
-          </a:prstGeom>
-        </p:spPr>
-        <p:txBody>
-          <a:bodyPr vert="horz" lIns="91440" tIns="45720" rIns="91440" bIns="45720" rtlCol="0"/>
-          <a:lstStyle>
-            <a:lvl1pPr algn="l">
-              <a:defRPr sz="1200"/>
-            </a:lvl1pPr>
-          </a:lstStyle>
-          <a:p>
-            <a:endParaRPr lang="en-US"/>
-          </a:p>
-        </p:txBody>
-      </p:sp>
-      <p:sp>
-        <p:nvSpPr>
-          <p:cNvPr id="3" name="Date Placeholder 2"/>
-          <p:cNvSpPr>
-            <a:spLocks noGrp="1"/>
-          </p:cNvSpPr>
-          <p:nvPr>
-            <p:ph type="dt" idx="1"/>
-          </p:nvPr>
-        </p:nvSpPr>
-        <p:spPr>
-          <a:xfrm>
-            <a:off x="3884613" y="0"/>
-            <a:ext cx="2971800" cy="457200"/>
-          </a:xfrm>
-          <a:prstGeom prst="rect">
-            <a:avLst/>
-          </a:prstGeom>
-        </p:spPr>
-        <p:txBody>
-          <a:bodyPr vert="horz" lIns="91440" tIns="45720" rIns="91440" bIns="45720" rtlCol="0"/>
-          <a:lstStyle>
-            <a:lvl1pPr algn="r">
-              <a:defRPr sz="1200"/>
-            </a:lvl1pPr>
-          </a:lstStyle>
-          <a:p>
-            <a:fld id="{0F89C1C7-3DCD-1040-A9CF-14679D8B5DDD}" type="datetimeFigureOut">
-              <a:rPr lang="en-US" smtClean="0"/>
-              <a:t>10/17/16</a:t>
-            </a:fld>
-            <a:endParaRPr lang="en-US"/>
-          </a:p>
-        </p:txBody>
-      </p:sp>
-      <p:sp>
-        <p:nvSpPr>
-          <p:cNvPr id="4" name="Slide Image Placeholder 3"/>
-          <p:cNvSpPr>
-            <a:spLocks noGrp="1" noRot="1" noChangeAspect="1"/>
-          </p:cNvSpPr>
-          <p:nvPr>
-            <p:ph type="sldImg" idx="2"/>
-          </p:nvPr>
-        </p:nvSpPr>
-        <p:spPr>
-          <a:xfrm>
-            <a:off x="1143000" y="685800"/>
-            <a:ext cx="4572000" cy="3429000"/>
-          </a:xfrm>
-          <a:prstGeom prst="rect">
-            <a:avLst/>
-          </a:prstGeom>
-          <a:noFill/>
-          <a:ln w="12700">
-            <a:solidFill>
-              <a:prstClr val="black"/>
-            </a:solidFill>
-          </a:ln>
-        </p:spPr>
-        <p:txBody>
-          <a:bodyPr vert="horz" lIns="91440" tIns="45720" rIns="91440" bIns="45720" rtlCol="0" anchor="ctr"/>
-          <a:lstStyle/>
-          <a:p>
-            <a:endParaRPr lang="en-US"/>
-          </a:p>
-        </p:txBody>
-      </p:sp>
-      <p:sp>
-        <p:nvSpPr>
-          <p:cNvPr id="5" name="Notes Placeholder 4"/>
-          <p:cNvSpPr>
-            <a:spLocks noGrp="1"/>
-          </p:cNvSpPr>
-          <p:nvPr>
-            <p:ph type="body" sz="quarter" idx="3"/>
-          </p:nvPr>
-        </p:nvSpPr>
-        <p:spPr>
-          <a:xfrm>
-            <a:off x="685800" y="4343400"/>
-            <a:ext cx="5486400" cy="4114800"/>
-          </a:xfrm>
-          <a:prstGeom prst="rect">
-            <a:avLst/>
-          </a:prstGeom>
-        </p:spPr>
-        <p:txBody>
-          <a:bodyPr vert="horz" lIns="91440" tIns="45720" rIns="91440" bIns="45720" rtlCol="0"/>
-          <a:lstStyle/>
-          <a:p>
-            <a:pPr lvl="0"/>
-            <a:r>
-              <a:rPr lang="en-US" smtClean="0"/>
-              <a:t>Click to edit Master text styles</a:t>
-            </a:r>
-          </a:p>
-          <a:p>
-            <a:pPr lvl="1"/>
-            <a:r>
-              <a:rPr lang="en-US" smtClean="0"/>
-              <a:t>Second level</a:t>
-            </a:r>
-          </a:p>
-          <a:p>
-            <a:pPr lvl="2"/>
-            <a:r>
-              <a:rPr lang="en-US" smtClean="0"/>
-              <a:t>Third level</a:t>
-            </a:r>
-          </a:p>
-          <a:p>
-            <a:pPr lvl="3"/>
-            <a:r>
-              <a:rPr lang="en-US" smtClean="0"/>
-              <a:t>Fourth level</a:t>
-            </a:r>
-          </a:p>
-          <a:p>
-            <a:pPr lvl="4"/>
-            <a:r>
-              <a:rPr lang="en-US" smtClean="0"/>
-              <a:t>Fifth level</a:t>
-            </a:r>
-            <a:endParaRPr lang="en-US"/>
-          </a:p>
-        </p:txBody>
-      </p:sp>
-      <p:sp>
-        <p:nvSpPr>
-          <p:cNvPr id="6" name="Footer Placeholder 5"/>
-          <p:cNvSpPr>
-            <a:spLocks noGrp="1"/>
-          </p:cNvSpPr>
-          <p:nvPr>
-            <p:ph type="ftr" sz="quarter" idx="4"/>
-          </p:nvPr>
-        </p:nvSpPr>
-        <p:spPr>
-          <a:xfrm>
-            <a:off x="0" y="8685213"/>
-            <a:ext cx="2971800" cy="457200"/>
-          </a:xfrm>
-          <a:prstGeom prst="rect">
-            <a:avLst/>
-          </a:prstGeom>
-        </p:spPr>
-        <p:txBody>
-          <a:bodyPr vert="horz" lIns="91440" tIns="45720" rIns="91440" bIns="45720" rtlCol="0" anchor="b"/>
-          <a:lstStyle>
-            <a:lvl1pPr algn="l">
-              <a:defRPr sz="1200"/>
-            </a:lvl1pPr>
-          </a:lstStyle>
-          <a:p>
-            <a:endParaRPr lang="en-US"/>
-          </a:p>
-        </p:txBody>
-      </p:sp>
-      <p:sp>
-        <p:nvSpPr>
-          <p:cNvPr id="7" name="Slide Number Placeholder 6"/>
-          <p:cNvSpPr>
-            <a:spLocks noGrp="1"/>
-          </p:cNvSpPr>
-          <p:nvPr>
-            <p:ph type="sldNum" sz="quarter" idx="5"/>
-          </p:nvPr>
-        </p:nvSpPr>
-        <p:spPr>
-          <a:xfrm>
-            <a:off x="3884613" y="8685213"/>
-            <a:ext cx="2971800" cy="457200"/>
-          </a:xfrm>
-          <a:prstGeom prst="rect">
-            <a:avLst/>
-          </a:prstGeom>
-        </p:spPr>
-        <p:txBody>
-          <a:bodyPr vert="horz" lIns="91440" tIns="45720" rIns="91440" bIns="45720" rtlCol="0" anchor="b"/>
-          <a:lstStyle>
-            <a:lvl1pPr algn="r">
-              <a:defRPr sz="1200"/>
-            </a:lvl1pPr>
-          </a:lstStyle>
-          <a:p>
-            <a:fld id="{BB5E49A5-4136-284D-997B-48E1D791AD67}" type="slidenum">
-              <a:rPr lang="en-US" smtClean="0"/>
-              <a:t>‹#›</a:t>
-            </a:fld>
-            <a:endParaRPr lang="en-US"/>
-          </a:p>
-        </p:txBody>
-      </p:sp>
     </p:spTree>
     <p:extLst>
       <p:ext uri="{BB962C8B-B14F-4D97-AF65-F5344CB8AC3E}">
-        <p14:creationId xmlns:p14="http://schemas.microsoft.com/office/powerpoint/2010/main" val="2623252185"/>
+        <p14:creationId xmlns:p14="http://schemas.microsoft.com/office/powerpoint/2010/main" val="292553357"/>
       </p:ext>
     </p:extLst>
   </p:cSld>
   <p:clrMap bg1="lt1" tx1="dk1" bg2="lt2" tx2="dk2" accent1="accent1" accent2="accent2" accent3="accent3" accent4="accent4" accent5="accent5" accent6="accent6" hlink="hlink" folHlink="folHlink"/>
   <p:notesStyle>
-    <a:lvl1pPr marL="0" algn="l" defTabSz="457200" rtl="0" eaLnBrk="1" latinLnBrk="0" hangingPunct="1">
+    <a:lvl1pPr marL="0" algn="l" defTabSz="914400" rtl="0" eaLnBrk="1" latinLnBrk="0" hangingPunct="1">
       <a:defRPr sz="1200" kern="1200">
         <a:solidFill>
           <a:schemeClr val="tx1"/>
@@ -381,7 +175,7 @@
         <a:cs typeface="+mn-cs"/>
       </a:defRPr>
     </a:lvl1pPr>
-    <a:lvl2pPr marL="457200" algn="l" defTabSz="457200" rtl="0" eaLnBrk="1" latinLnBrk="0" hangingPunct="1">
+    <a:lvl2pPr marL="457200" algn="l" defTabSz="914400" rtl="0" eaLnBrk="1" latinLnBrk="0" hangingPunct="1">
       <a:defRPr sz="1200" kern="1200">
         <a:solidFill>
           <a:schemeClr val="tx1"/>
@@ -391,7 +185,7 @@
         <a:cs typeface="+mn-cs"/>
       </a:defRPr>
     </a:lvl2pPr>
-    <a:lvl3pPr marL="914400" algn="l" defTabSz="457200" rtl="0" eaLnBrk="1" latinLnBrk="0" hangingPunct="1">
+    <a:lvl3pPr marL="914400" algn="l" defTabSz="914400" rtl="0" eaLnBrk="1" latinLnBrk="0" hangingPunct="1">
       <a:defRPr sz="1200" kern="1200">
         <a:solidFill>
           <a:schemeClr val="tx1"/>
@@ -401,7 +195,7 @@
         <a:cs typeface="+mn-cs"/>
       </a:defRPr>
     </a:lvl3pPr>
-    <a:lvl4pPr marL="1371600" algn="l" defTabSz="457200" rtl="0" eaLnBrk="1" latinLnBrk="0" hangingPunct="1">
+    <a:lvl4pPr marL="1371600" algn="l" defTabSz="914400" rtl="0" eaLnBrk="1" latinLnBrk="0" hangingPunct="1">
       <a:defRPr sz="1200" kern="1200">
         <a:solidFill>
           <a:schemeClr val="tx1"/>
@@ -411,7 +205,7 @@
         <a:cs typeface="+mn-cs"/>
       </a:defRPr>
     </a:lvl4pPr>
-    <a:lvl5pPr marL="1828800" algn="l" defTabSz="457200" rtl="0" eaLnBrk="1" latinLnBrk="0" hangingPunct="1">
+    <a:lvl5pPr marL="1828800" algn="l" defTabSz="914400" rtl="0" eaLnBrk="1" latinLnBrk="0" hangingPunct="1">
       <a:defRPr sz="1200" kern="1200">
         <a:solidFill>
           <a:schemeClr val="tx1"/>
@@ -421,7 +215,7 @@
         <a:cs typeface="+mn-cs"/>
       </a:defRPr>
     </a:lvl5pPr>
-    <a:lvl6pPr marL="2286000" algn="l" defTabSz="457200" rtl="0" eaLnBrk="1" latinLnBrk="0" hangingPunct="1">
+    <a:lvl6pPr marL="2286000" algn="l" defTabSz="914400" rtl="0" eaLnBrk="1" latinLnBrk="0" hangingPunct="1">
       <a:defRPr sz="1200" kern="1200">
         <a:solidFill>
           <a:schemeClr val="tx1"/>
@@ -431,7 +225,7 @@
         <a:cs typeface="+mn-cs"/>
       </a:defRPr>
     </a:lvl6pPr>
-    <a:lvl7pPr marL="2743200" algn="l" defTabSz="457200" rtl="0" eaLnBrk="1" latinLnBrk="0" hangingPunct="1">
+    <a:lvl7pPr marL="2743200" algn="l" defTabSz="914400" rtl="0" eaLnBrk="1" latinLnBrk="0" hangingPunct="1">
       <a:defRPr sz="1200" kern="1200">
         <a:solidFill>
           <a:schemeClr val="tx1"/>
@@ -441,7 +235,7 @@
         <a:cs typeface="+mn-cs"/>
       </a:defRPr>
     </a:lvl7pPr>
-    <a:lvl8pPr marL="3200400" algn="l" defTabSz="457200" rtl="0" eaLnBrk="1" latinLnBrk="0" hangingPunct="1">
+    <a:lvl8pPr marL="3200400" algn="l" defTabSz="914400" rtl="0" eaLnBrk="1" latinLnBrk="0" hangingPunct="1">
       <a:defRPr sz="1200" kern="1200">
         <a:solidFill>
           <a:schemeClr val="tx1"/>
@@ -451,7 +245,7 @@
         <a:cs typeface="+mn-cs"/>
       </a:defRPr>
     </a:lvl8pPr>
-    <a:lvl9pPr marL="3657600" algn="l" defTabSz="457200" rtl="0" eaLnBrk="1" latinLnBrk="0" hangingPunct="1">
+    <a:lvl9pPr marL="3657600" algn="l" defTabSz="914400" rtl="0" eaLnBrk="1" latinLnBrk="0" hangingPunct="1">
       <a:defRPr sz="1200" kern="1200">
         <a:solidFill>
           <a:schemeClr val="tx1"/>
@@ -466,7 +260,7 @@
 </file>
 
 <file path=ppt/notesSlides/notesSlide1.xml><?xml version="1.0" encoding="utf-8"?>
-<p:notes xmlns:a="http://schemas.openxmlformats.org/drawingml/2006/main" xmlns:p="http://schemas.openxmlformats.org/presentationml/2006/main" xmlns:r="http://schemas.openxmlformats.org/officeDocument/2006/relationships">
+<p:notes xmlns:a="http://schemas.openxmlformats.org/drawingml/2006/main" xmlns:r="http://schemas.openxmlformats.org/officeDocument/2006/relationships" xmlns:p="http://schemas.openxmlformats.org/presentationml/2006/main">
   <p:cSld>
     <p:spTree>
       <p:nvGrpSpPr>
@@ -486,55 +280,59 @@
         <p:nvSpPr>
           <p:cNvPr id="2" name="Slide Image Placeholder 1"/>
           <p:cNvSpPr>
+            <a:spLocks noGrp="1" noRot="1" noChangeAspect="1"/>
+          </p:cNvSpPr>
+          <p:nvPr>
+            <p:ph type="sldImg" idx="2"/>
+          </p:nvPr>
+        </p:nvSpPr>
+        <p:spPr/>
+      </p:sp>
+      <p:sp>
+        <p:nvSpPr>
+          <p:cNvPr id="3" name="Notes Placeholder 2"/>
+          <p:cNvSpPr>
             <a:spLocks noGrp="1"/>
           </p:cNvSpPr>
           <p:nvPr>
-            <p:ph type="sldImg" idx="2"/>
+            <p:ph type="body" sz="quarter" idx="3"/>
           </p:nvPr>
         </p:nvSpPr>
         <p:spPr/>
-      </p:sp>
-      <p:sp>
-        <p:nvSpPr>
-          <p:cNvPr id="3" name="Notes Placeholder 2"/>
+        <p:txBody>
+          <a:bodyPr/>
+          <a:lstStyle/>
+          <a:p>
+            <a:r>
+              <a:t>TIME: ~30 seconds.</a:t>
+            </a:r>
+          </a:p>
+          <a:p>
+            <a:endParaRPr/>
+          </a:p>
+          <a:p>
+            <a:r>
+              <a:t>SAY: 'Good &lt;morning/afternoon&gt;. Our project is a Retrieval-Augmented Generation chatbot that answers questions about uploaded course PDFs. Every answer is grounded in retrieved passages and shown with a citation, so the user can verify it. We also added a parameter-efficient fine-tuning experiment using LoRA on FLAN-T5-small as a research-level comparison.'</a:t>
+            </a:r>
+          </a:p>
+          <a:p>
+            <a:endParaRPr/>
+          </a:p>
+          <a:p>
+            <a:r>
+              <a:t>ACTION: Introduce yourself and your teammates here. Edit the team names placeholder in this slide. Keep it short — move on at 30s.</a:t>
+            </a:r>
+          </a:p>
+        </p:txBody>
+      </p:sp>
+      <p:sp>
+        <p:nvSpPr>
+          <p:cNvPr id="4" name="Slide Number Placeholder 3"/>
           <p:cNvSpPr>
             <a:spLocks noGrp="1"/>
           </p:cNvSpPr>
           <p:nvPr>
-            <p:ph type="body" idx="3" sz="quarter"/>
-          </p:nvPr>
-        </p:nvSpPr>
-        <p:spPr/>
-        <p:txBody>
-          <a:bodyPr/>
-          <a:lstStyle/>
-          <a:p>
-            <a:r>
-              <a:t>TIME: ~30 seconds.</a:t>
-            </a:r>
-          </a:p>
-          <a:p/>
-          <a:p>
-            <a:r>
-              <a:t>SAY: 'Good &lt;morning/afternoon&gt;. Our project is a Retrieval-Augmented Generation chatbot that answers questions about uploaded course PDFs. Every answer is grounded in retrieved passages and shown with a citation, so the user can verify it. We also added a parameter-efficient fine-tuning experiment using LoRA on FLAN-T5-small as a research-level comparison.'</a:t>
-            </a:r>
-          </a:p>
-          <a:p/>
-          <a:p>
-            <a:r>
-              <a:t>ACTION: Introduce yourself and your teammates here. Edit the team names placeholder in this slide. Keep it short — move on at 30s.</a:t>
-            </a:r>
-          </a:p>
-        </p:txBody>
-      </p:sp>
-      <p:sp>
-        <p:nvSpPr>
-          <p:cNvPr id="4" name="Slide Number Placeholder 3"/>
-          <p:cNvSpPr>
-            <a:spLocks noGrp="1"/>
-          </p:cNvSpPr>
-          <p:nvPr>
-            <p:ph type="sldNum" idx="5" sz="quarter"/>
+            <p:ph type="sldNum" sz="quarter" idx="5"/>
           </p:nvPr>
         </p:nvSpPr>
         <p:spPr/>
@@ -548,7 +346,7 @@
 </file>
 
 <file path=ppt/notesSlides/notesSlide2.xml><?xml version="1.0" encoding="utf-8"?>
-<p:notes xmlns:a="http://schemas.openxmlformats.org/drawingml/2006/main" xmlns:p="http://schemas.openxmlformats.org/presentationml/2006/main" xmlns:r="http://schemas.openxmlformats.org/officeDocument/2006/relationships">
+<p:notes xmlns:a="http://schemas.openxmlformats.org/drawingml/2006/main" xmlns:r="http://schemas.openxmlformats.org/officeDocument/2006/relationships" xmlns:p="http://schemas.openxmlformats.org/presentationml/2006/main">
   <p:cSld>
     <p:spTree>
       <p:nvGrpSpPr>
@@ -568,55 +366,59 @@
         <p:nvSpPr>
           <p:cNvPr id="2" name="Slide Image Placeholder 1"/>
           <p:cNvSpPr>
+            <a:spLocks noGrp="1" noRot="1" noChangeAspect="1"/>
+          </p:cNvSpPr>
+          <p:nvPr>
+            <p:ph type="sldImg" idx="2"/>
+          </p:nvPr>
+        </p:nvSpPr>
+        <p:spPr/>
+      </p:sp>
+      <p:sp>
+        <p:nvSpPr>
+          <p:cNvPr id="3" name="Notes Placeholder 2"/>
+          <p:cNvSpPr>
             <a:spLocks noGrp="1"/>
           </p:cNvSpPr>
           <p:nvPr>
-            <p:ph type="sldImg" idx="2"/>
+            <p:ph type="body" sz="quarter" idx="3"/>
           </p:nvPr>
         </p:nvSpPr>
         <p:spPr/>
-      </p:sp>
-      <p:sp>
-        <p:nvSpPr>
-          <p:cNvPr id="3" name="Notes Placeholder 2"/>
+        <p:txBody>
+          <a:bodyPr/>
+          <a:lstStyle/>
+          <a:p>
+            <a:r>
+              <a:t>TIME: ~45 seconds (1st of two intro slides).</a:t>
+            </a:r>
+          </a:p>
+          <a:p>
+            <a:endParaRPr/>
+          </a:p>
+          <a:p>
+            <a:r>
+              <a:t>SAY: 'Course documents — syllabi, project requirements, presentation guidelines — are the kind of thing students re-read constantly. A naive LLM will happily make up a deadline or a grading weight, and that is genuinely harmful. So our research question was: can we build a chatbot that ONLY answers from the actual document, refuses when the document does not support an answer, and always shows where its answer came from? That single principle — refuse rather than hallucinate — drives every design choice.'</a:t>
+            </a:r>
+          </a:p>
+          <a:p>
+            <a:endParaRPr/>
+          </a:p>
+          <a:p>
+            <a:r>
+              <a:t>EMPHASIZE: This project touches every CSE 534 topic — prompting, retrieval, fine-tuning, and evaluation.</a:t>
+            </a:r>
+          </a:p>
+        </p:txBody>
+      </p:sp>
+      <p:sp>
+        <p:nvSpPr>
+          <p:cNvPr id="4" name="Slide Number Placeholder 3"/>
           <p:cNvSpPr>
             <a:spLocks noGrp="1"/>
           </p:cNvSpPr>
           <p:nvPr>
-            <p:ph type="body" idx="3" sz="quarter"/>
-          </p:nvPr>
-        </p:nvSpPr>
-        <p:spPr/>
-        <p:txBody>
-          <a:bodyPr/>
-          <a:lstStyle/>
-          <a:p>
-            <a:r>
-              <a:t>TIME: ~45 seconds (1st of two intro slides).</a:t>
-            </a:r>
-          </a:p>
-          <a:p/>
-          <a:p>
-            <a:r>
-              <a:t>SAY: 'Course documents — syllabi, project requirements, presentation guidelines — are the kind of thing students re-read constantly. A naive LLM will happily make up a deadline or a grading weight, and that is genuinely harmful. So our research question was: can we build a chatbot that ONLY answers from the actual document, refuses when the document does not support an answer, and always shows where its answer came from? That single principle — refuse rather than hallucinate — drives every design choice.'</a:t>
-            </a:r>
-          </a:p>
-          <a:p/>
-          <a:p>
-            <a:r>
-              <a:t>EMPHASIZE: This project touches every CSE 534 topic — prompting, retrieval, fine-tuning, and evaluation.</a:t>
-            </a:r>
-          </a:p>
-        </p:txBody>
-      </p:sp>
-      <p:sp>
-        <p:nvSpPr>
-          <p:cNvPr id="4" name="Slide Number Placeholder 3"/>
-          <p:cNvSpPr>
-            <a:spLocks noGrp="1"/>
-          </p:cNvSpPr>
-          <p:nvPr>
-            <p:ph type="sldNum" idx="5" sz="quarter"/>
+            <p:ph type="sldNum" sz="quarter" idx="5"/>
           </p:nvPr>
         </p:nvSpPr>
         <p:spPr/>
@@ -630,7 +432,7 @@
 </file>
 
 <file path=ppt/notesSlides/notesSlide3.xml><?xml version="1.0" encoding="utf-8"?>
-<p:notes xmlns:a="http://schemas.openxmlformats.org/drawingml/2006/main" xmlns:p="http://schemas.openxmlformats.org/presentationml/2006/main" xmlns:r="http://schemas.openxmlformats.org/officeDocument/2006/relationships">
+<p:notes xmlns:a="http://schemas.openxmlformats.org/drawingml/2006/main" xmlns:r="http://schemas.openxmlformats.org/officeDocument/2006/relationships" xmlns:p="http://schemas.openxmlformats.org/presentationml/2006/main">
   <p:cSld>
     <p:spTree>
       <p:nvGrpSpPr>
@@ -650,55 +452,59 @@
         <p:nvSpPr>
           <p:cNvPr id="2" name="Slide Image Placeholder 1"/>
           <p:cNvSpPr>
+            <a:spLocks noGrp="1" noRot="1" noChangeAspect="1"/>
+          </p:cNvSpPr>
+          <p:nvPr>
+            <p:ph type="sldImg" idx="2"/>
+          </p:nvPr>
+        </p:nvSpPr>
+        <p:spPr/>
+      </p:sp>
+      <p:sp>
+        <p:nvSpPr>
+          <p:cNvPr id="3" name="Notes Placeholder 2"/>
+          <p:cNvSpPr>
             <a:spLocks noGrp="1"/>
           </p:cNvSpPr>
           <p:nvPr>
-            <p:ph type="sldImg" idx="2"/>
+            <p:ph type="body" sz="quarter" idx="3"/>
           </p:nvPr>
         </p:nvSpPr>
         <p:spPr/>
-      </p:sp>
-      <p:sp>
-        <p:nvSpPr>
-          <p:cNvPr id="3" name="Notes Placeholder 2"/>
+        <p:txBody>
+          <a:bodyPr/>
+          <a:lstStyle/>
+          <a:p>
+            <a:r>
+              <a:t>TIME: ~45 seconds.</a:t>
+            </a:r>
+          </a:p>
+          <a:p>
+            <a:endParaRPr/>
+          </a:p>
+          <a:p>
+            <a:r>
+              <a:t>SAY: 'Concretely: input is a free-form question, output is an answer grounded in the document. The hard requirement is no invention — if the document does not support an answer, the bot returns a fixed refusal sentence. Every answer also includes citations like Syllabus.pdf p.3, and every interaction is logged so a grader can reproduce why the bot said what it said. As a research extension we also fine-tune a small model with LoRA on QA pairs derived from the same chunks, and we compare it against the RAG baseline.'</a:t>
+            </a:r>
+          </a:p>
+          <a:p>
+            <a:endParaRPr/>
+          </a:p>
+          <a:p>
+            <a:r>
+              <a:t>TRANSITION: 'Now let me show you what data this is built on.'</a:t>
+            </a:r>
+          </a:p>
+        </p:txBody>
+      </p:sp>
+      <p:sp>
+        <p:nvSpPr>
+          <p:cNvPr id="4" name="Slide Number Placeholder 3"/>
           <p:cNvSpPr>
             <a:spLocks noGrp="1"/>
           </p:cNvSpPr>
           <p:nvPr>
-            <p:ph type="body" idx="3" sz="quarter"/>
-          </p:nvPr>
-        </p:nvSpPr>
-        <p:spPr/>
-        <p:txBody>
-          <a:bodyPr/>
-          <a:lstStyle/>
-          <a:p>
-            <a:r>
-              <a:t>TIME: ~45 seconds.</a:t>
-            </a:r>
-          </a:p>
-          <a:p/>
-          <a:p>
-            <a:r>
-              <a:t>SAY: 'Concretely: input is a free-form question, output is an answer grounded in the document. The hard requirement is no invention — if the document does not support an answer, the bot returns a fixed refusal sentence. Every answer also includes citations like Syllabus.pdf p.3, and every interaction is logged so a grader can reproduce why the bot said what it said. As a research extension we also fine-tune a small model with LoRA on QA pairs derived from the same chunks, and we compare it against the RAG baseline.'</a:t>
-            </a:r>
-          </a:p>
-          <a:p/>
-          <a:p>
-            <a:r>
-              <a:t>TRANSITION: 'Now let me show you what data this is built on.'</a:t>
-            </a:r>
-          </a:p>
-        </p:txBody>
-      </p:sp>
-      <p:sp>
-        <p:nvSpPr>
-          <p:cNvPr id="4" name="Slide Number Placeholder 3"/>
-          <p:cNvSpPr>
-            <a:spLocks noGrp="1"/>
-          </p:cNvSpPr>
-          <p:nvPr>
-            <p:ph type="sldNum" idx="5" sz="quarter"/>
+            <p:ph type="sldNum" sz="quarter" idx="5"/>
           </p:nvPr>
         </p:nvSpPr>
         <p:spPr/>
@@ -712,7 +518,7 @@
 </file>
 
 <file path=ppt/notesSlides/notesSlide4.xml><?xml version="1.0" encoding="utf-8"?>
-<p:notes xmlns:a="http://schemas.openxmlformats.org/drawingml/2006/main" xmlns:p="http://schemas.openxmlformats.org/presentationml/2006/main" xmlns:r="http://schemas.openxmlformats.org/officeDocument/2006/relationships">
+<p:notes xmlns:a="http://schemas.openxmlformats.org/drawingml/2006/main" xmlns:r="http://schemas.openxmlformats.org/officeDocument/2006/relationships" xmlns:p="http://schemas.openxmlformats.org/presentationml/2006/main">
   <p:cSld>
     <p:spTree>
       <p:nvGrpSpPr>
@@ -732,61 +538,67 @@
         <p:nvSpPr>
           <p:cNvPr id="2" name="Slide Image Placeholder 1"/>
           <p:cNvSpPr>
+            <a:spLocks noGrp="1" noRot="1" noChangeAspect="1"/>
+          </p:cNvSpPr>
+          <p:nvPr>
+            <p:ph type="sldImg" idx="2"/>
+          </p:nvPr>
+        </p:nvSpPr>
+        <p:spPr/>
+      </p:sp>
+      <p:sp>
+        <p:nvSpPr>
+          <p:cNvPr id="3" name="Notes Placeholder 2"/>
+          <p:cNvSpPr>
             <a:spLocks noGrp="1"/>
           </p:cNvSpPr>
           <p:nvPr>
-            <p:ph type="sldImg" idx="2"/>
+            <p:ph type="body" sz="quarter" idx="3"/>
           </p:nvPr>
         </p:nvSpPr>
         <p:spPr/>
-      </p:sp>
-      <p:sp>
-        <p:nvSpPr>
-          <p:cNvPr id="3" name="Notes Placeholder 2"/>
+        <p:txBody>
+          <a:bodyPr/>
+          <a:lstStyle/>
+          <a:p>
+            <a:r>
+              <a:t>TIME: ~1 minute.</a:t>
+            </a:r>
+          </a:p>
+          <a:p>
+            <a:endParaRPr/>
+          </a:p>
+          <a:p>
+            <a:r>
+              <a:t>SAY: 'Our corpus is the actual CSE 534 course material — four PDFs: the syllabus, the project requirements, the midterm check, and the presentation guideline. We extract page-level text with pypdf, clean whitespace, and run a heading-aware chunker that first splits on section titles like "Grading Policy" or "Schedule" and then recursively splits long sections into 800-character chunks with 150 characters of overlap. Tiny stub chunks are merged backward.'</a:t>
+            </a:r>
+          </a:p>
+          <a:p>
+            <a:endParaRPr/>
+          </a:p>
+          <a:p>
+            <a:r>
+              <a:t>SAY: 'For evaluation we wrote a 25-question gold CSV that names the expected supporting document and page for each question. For the LoRA experiment we automatically generated 117 template-based grounded QA pairs from the chunks — split into 94 training and 23 evaluation examples with a fixed seed.'</a:t>
+            </a:r>
+          </a:p>
+          <a:p>
+            <a:endParaRPr/>
+          </a:p>
+          <a:p>
+            <a:r>
+              <a:t>ETHICS: Mention briefly: data is user-uploaded, indexing runs locally, no PII in syllabi, only the LLM call hits the network.</a:t>
+            </a:r>
+          </a:p>
+        </p:txBody>
+      </p:sp>
+      <p:sp>
+        <p:nvSpPr>
+          <p:cNvPr id="4" name="Slide Number Placeholder 3"/>
           <p:cNvSpPr>
             <a:spLocks noGrp="1"/>
           </p:cNvSpPr>
           <p:nvPr>
-            <p:ph type="body" idx="3" sz="quarter"/>
-          </p:nvPr>
-        </p:nvSpPr>
-        <p:spPr/>
-        <p:txBody>
-          <a:bodyPr/>
-          <a:lstStyle/>
-          <a:p>
-            <a:r>
-              <a:t>TIME: ~1 minute.</a:t>
-            </a:r>
-          </a:p>
-          <a:p/>
-          <a:p>
-            <a:r>
-              <a:t>SAY: 'Our corpus is the actual CSE 534 course material — four PDFs: the syllabus, the project requirements, the midterm check, and the presentation guideline. We extract page-level text with pypdf, clean whitespace, and run a heading-aware chunker that first splits on section titles like "Grading Policy" or "Schedule" and then recursively splits long sections into 800-character chunks with 150 characters of overlap. Tiny stub chunks are merged backward.'</a:t>
-            </a:r>
-          </a:p>
-          <a:p/>
-          <a:p>
-            <a:r>
-              <a:t>SAY: 'For evaluation we wrote a 25-question gold CSV that names the expected supporting document and page for each question. For the LoRA experiment we automatically generated 117 template-based grounded QA pairs from the chunks — split into 94 training and 23 evaluation examples with a fixed seed.'</a:t>
-            </a:r>
-          </a:p>
-          <a:p/>
-          <a:p>
-            <a:r>
-              <a:t>ETHICS: Mention briefly: data is user-uploaded, indexing runs locally, no PII in syllabi, only the LLM call hits the network.</a:t>
-            </a:r>
-          </a:p>
-        </p:txBody>
-      </p:sp>
-      <p:sp>
-        <p:nvSpPr>
-          <p:cNvPr id="4" name="Slide Number Placeholder 3"/>
-          <p:cNvSpPr>
-            <a:spLocks noGrp="1"/>
-          </p:cNvSpPr>
-          <p:nvPr>
-            <p:ph type="sldNum" idx="5" sz="quarter"/>
+            <p:ph type="sldNum" sz="quarter" idx="5"/>
           </p:nvPr>
         </p:nvSpPr>
         <p:spPr/>
@@ -800,7 +612,7 @@
 </file>
 
 <file path=ppt/notesSlides/notesSlide5.xml><?xml version="1.0" encoding="utf-8"?>
-<p:notes xmlns:a="http://schemas.openxmlformats.org/drawingml/2006/main" xmlns:p="http://schemas.openxmlformats.org/presentationml/2006/main" xmlns:r="http://schemas.openxmlformats.org/officeDocument/2006/relationships">
+<p:notes xmlns:a="http://schemas.openxmlformats.org/drawingml/2006/main" xmlns:r="http://schemas.openxmlformats.org/officeDocument/2006/relationships" xmlns:p="http://schemas.openxmlformats.org/presentationml/2006/main">
   <p:cSld>
     <p:spTree>
       <p:nvGrpSpPr>
@@ -820,61 +632,75 @@
         <p:nvSpPr>
           <p:cNvPr id="2" name="Slide Image Placeholder 1"/>
           <p:cNvSpPr>
+            <a:spLocks noGrp="1" noRot="1" noChangeAspect="1"/>
+          </p:cNvSpPr>
+          <p:nvPr>
+            <p:ph type="sldImg" idx="2"/>
+          </p:nvPr>
+        </p:nvSpPr>
+        <p:spPr/>
+      </p:sp>
+      <p:sp>
+        <p:nvSpPr>
+          <p:cNvPr id="3" name="Notes Placeholder 2"/>
+          <p:cNvSpPr>
             <a:spLocks noGrp="1"/>
           </p:cNvSpPr>
           <p:nvPr>
-            <p:ph type="sldImg" idx="2"/>
+            <p:ph type="body" sz="quarter" idx="3"/>
           </p:nvPr>
         </p:nvSpPr>
         <p:spPr/>
-      </p:sp>
-      <p:sp>
-        <p:nvSpPr>
-          <p:cNvPr id="3" name="Notes Placeholder 2"/>
+        <p:txBody>
+          <a:bodyPr/>
+          <a:lstStyle/>
+          <a:p>
+            <a:r>
+              <a:t>TIME: ~1 minute (slide 1 of 2 in methods).</a:t>
+            </a:r>
+          </a:p>
+          <a:p>
+            <a:endParaRPr/>
+          </a:p>
+          <a:p>
+            <a:r>
+              <a:t>WALK THE DIAGRAM TOP TO BOTTOM:</a:t>
+            </a:r>
+          </a:p>
+          <a:p>
+            <a:endParaRPr/>
+          </a:p>
+          <a:p>
+            <a:r>
+              <a:t>SAY: 'The top row is INGEST. Each uploaded PDF is read page-by-page with pypdf, split into roughly 800-character section-aware chunks, embedded with all-MiniLM-L6-v2 into 384-dimensional L2-normalized vectors, and stored in a flat FAISS index that is persisted to disk.'</a:t>
+            </a:r>
+          </a:p>
+          <a:p>
+            <a:endParaRPr/>
+          </a:p>
+          <a:p>
+            <a:r>
+              <a:t>SAY: 'The bottom row is QUERY. The user question is embedded with the exact same model so the question vector lives in the same space as the chunk vectors — that is what the long arrow in the middle is showing. Top-k retrieval pulls the closest chunks using dense FAISS, sparse BM25, or a weighted hybrid. Then comes the single most important box on the slide — the confidence guardrail. If the top similarity score is below 0.25, the pipeline refuses to even call the LLM, returning a fixed unsupported sentence. That one check is our primary anti-hallucination defense.'</a:t>
+            </a:r>
+          </a:p>
+          <a:p>
+            <a:endParaRPr/>
+          </a:p>
+          <a:p>
+            <a:r>
+              <a:t>SAY: 'Only when retrieval is strong does the question plus chunks go to the LLM under a strict prompt that forces context-only answers and citations like [Syllabus.pdf p.3]. The final answer is shown to the user with the citations and the retrieved chunks for transparency.'</a:t>
+            </a:r>
+          </a:p>
+        </p:txBody>
+      </p:sp>
+      <p:sp>
+        <p:nvSpPr>
+          <p:cNvPr id="4" name="Slide Number Placeholder 3"/>
           <p:cNvSpPr>
             <a:spLocks noGrp="1"/>
           </p:cNvSpPr>
           <p:nvPr>
-            <p:ph type="body" idx="3" sz="quarter"/>
-          </p:nvPr>
-        </p:nvSpPr>
-        <p:spPr/>
-        <p:txBody>
-          <a:bodyPr/>
-          <a:lstStyle/>
-          <a:p>
-            <a:r>
-              <a:t>TIME: ~1 minute (slide 1 of 2 in methods).</a:t>
-            </a:r>
-          </a:p>
-          <a:p/>
-          <a:p>
-            <a:r>
-              <a:t>SAY: 'On the ingestion side, PDFs become pages, pages become chunks, chunks become L2-normalized vectors, and the vectors live in a FAISS index that is persisted to disk along with chunk metadata in a parquet file and a manifest JSON.'</a:t>
-            </a:r>
-          </a:p>
-          <a:p/>
-          <a:p>
-            <a:r>
-              <a:t>SAY: 'On the query side, the user question is embedded with the exact same model, retrieval pulls top-k chunks using one of three modes — dense, sparse, or a weighted hybrid — and a confidence guardrail short-circuits before the LLM is even called when the top score is too low. That guardrail is the single most important anti-hallucination defense.'</a:t>
-            </a:r>
-          </a:p>
-          <a:p/>
-          <a:p>
-            <a:r>
-              <a:t>POINT TO FIGURE: 'On the left you can see the per-document chunk counts so the audience can sanity-check that no PDF was silently dropped during ingestion.'</a:t>
-            </a:r>
-          </a:p>
-        </p:txBody>
-      </p:sp>
-      <p:sp>
-        <p:nvSpPr>
-          <p:cNvPr id="4" name="Slide Number Placeholder 3"/>
-          <p:cNvSpPr>
-            <a:spLocks noGrp="1"/>
-          </p:cNvSpPr>
-          <p:nvPr>
-            <p:ph type="sldNum" idx="5" sz="quarter"/>
+            <p:ph type="sldNum" sz="quarter" idx="5"/>
           </p:nvPr>
         </p:nvSpPr>
         <p:spPr/>
@@ -888,7 +714,7 @@
 </file>
 
 <file path=ppt/notesSlides/notesSlide6.xml><?xml version="1.0" encoding="utf-8"?>
-<p:notes xmlns:a="http://schemas.openxmlformats.org/drawingml/2006/main" xmlns:p="http://schemas.openxmlformats.org/presentationml/2006/main" xmlns:r="http://schemas.openxmlformats.org/officeDocument/2006/relationships">
+<p:notes xmlns:a="http://schemas.openxmlformats.org/drawingml/2006/main" xmlns:r="http://schemas.openxmlformats.org/officeDocument/2006/relationships" xmlns:p="http://schemas.openxmlformats.org/presentationml/2006/main">
   <p:cSld>
     <p:spTree>
       <p:nvGrpSpPr>
@@ -908,61 +734,83 @@
         <p:nvSpPr>
           <p:cNvPr id="2" name="Slide Image Placeholder 1"/>
           <p:cNvSpPr>
+            <a:spLocks noGrp="1" noRot="1" noChangeAspect="1"/>
+          </p:cNvSpPr>
+          <p:nvPr>
+            <p:ph type="sldImg" idx="2"/>
+          </p:nvPr>
+        </p:nvSpPr>
+        <p:spPr/>
+      </p:sp>
+      <p:sp>
+        <p:nvSpPr>
+          <p:cNvPr id="3" name="Notes Placeholder 2"/>
+          <p:cNvSpPr>
             <a:spLocks noGrp="1"/>
           </p:cNvSpPr>
           <p:nvPr>
-            <p:ph type="sldImg" idx="2"/>
+            <p:ph type="body" sz="quarter" idx="3"/>
           </p:nvPr>
         </p:nvSpPr>
         <p:spPr/>
-      </p:sp>
-      <p:sp>
-        <p:nvSpPr>
-          <p:cNvPr id="3" name="Notes Placeholder 2"/>
+        <p:txBody>
+          <a:bodyPr/>
+          <a:lstStyle/>
+          <a:p>
+            <a:r>
+              <a:t>TIME: ~1 minute (slide 2 of 2 in methods).</a:t>
+            </a:r>
+          </a:p>
+          <a:p>
+            <a:endParaRPr/>
+          </a:p>
+          <a:p>
+            <a:r>
+              <a:t>SAY: 'A few design choices worth calling out. First, we use a small sentence-transformer by default — MiniLM-L6-v2 — because it is fast, free, and well-understood, but the sidebar lets us swap in BGE or MPNet and rebuild the index without code changes. Second, we use a weighted hybrid of dense FAISS and BM25 sparse retrieval, because course documents contain very specific terms — week numbers, course codes — that benefit from exact keyword matching, while semantics still helps for paraphrased questions.'</a:t>
+            </a:r>
+          </a:p>
+          <a:p>
+            <a:endParaRPr/>
+          </a:p>
+          <a:p>
+            <a:r>
+              <a:t>SAY: 'Third, the prompt is intentionally strict — the LLM is told to refuse with a fixed sentence if the context does not support an answer, and we detect that exact sentence to mark the answer as ungrounded.'</a:t>
+            </a:r>
+          </a:p>
+          <a:p>
+            <a:endParaRPr/>
+          </a:p>
+          <a:p>
+            <a:r>
+              <a:t>SAY (LoRA): 'For fine-tuning, we ran a real LoRA experiment, not just a placeholder. We took FLAN-T5-small, FROZE the entire base model, and trained a tiny adapter — about 1.3 megabytes of weights — on just the query and value attention layers, using 99 question-answer pairs we generated from our own PDFs. The whole thing trains in a few minutes on a Mac CPU, and the held-out Jaccard score went up to roughly 0.68, so the adapter actually learned the document style.'</a:t>
+            </a:r>
+          </a:p>
+          <a:p>
+            <a:endParaRPr/>
+          </a:p>
+          <a:p>
+            <a:r>
+              <a:t>SAY (QLoRA): 'We also wired in QLoRA as an OPTIONAL path. QLoRA needs an NVIDIA GPU and the bitsandbytes library, neither of which exist on a Mac, so the app exposes it as a one-click readiness check that correctly reports "not available" on this machine. The actual experiment we run end-to-end is plain LoRA.'</a:t>
+            </a:r>
+          </a:p>
+          <a:p>
+            <a:endParaRPr/>
+          </a:p>
+          <a:p>
+            <a:r>
+              <a:t>SAY (engineering): 'Three pragmatic choices worth flagging. One — every LLM call uses low temperature (0.1) and a tight prompt to keep cost and rate limits in check. Two — training and indexing are CPU-only, no GPU required. And three — every index we build ships with a manifest.json that records the embedding model and chunk settings; if a teammate switches the embedding model in the sidebar, the app detects the mismatch and CLEARS the stale index automatically — that prevents the silent failure of querying with one model while the index was built with another.'</a:t>
+            </a:r>
+          </a:p>
+        </p:txBody>
+      </p:sp>
+      <p:sp>
+        <p:nvSpPr>
+          <p:cNvPr id="4" name="Slide Number Placeholder 3"/>
           <p:cNvSpPr>
             <a:spLocks noGrp="1"/>
           </p:cNvSpPr>
           <p:nvPr>
-            <p:ph type="body" idx="3" sz="quarter"/>
-          </p:nvPr>
-        </p:nvSpPr>
-        <p:spPr/>
-        <p:txBody>
-          <a:bodyPr/>
-          <a:lstStyle/>
-          <a:p>
-            <a:r>
-              <a:t>TIME: ~1 minute (slide 2 of 2 in methods).</a:t>
-            </a:r>
-          </a:p>
-          <a:p/>
-          <a:p>
-            <a:r>
-              <a:t>SAY: 'A few design choices worth calling out. First, we use a small sentence-transformer by default — MiniLM-L6-v2 — because it is fast, free, and well-understood, but the sidebar lets us swap in BGE or MPNet and rebuild the index without code changes. Second, we use a weighted hybrid of dense FAISS and BM25 sparse retrieval, because course documents contain very specific terms — week numbers, course codes — that benefit from exact keyword matching, while semantics still helps for paraphrased questions.'</a:t>
-            </a:r>
-          </a:p>
-          <a:p/>
-          <a:p>
-            <a:r>
-              <a:t>SAY: 'Third, the prompt is intentionally strict — the LLM is told to refuse with a fixed sentence if the context does not support an answer, and we detect that exact sentence to mark the answer as ungrounded.'</a:t>
-            </a:r>
-          </a:p>
-          <a:p/>
-          <a:p>
-            <a:r>
-              <a:t>SAY: 'For the LoRA experiment, we attach a PEFT adapter to just the query and value attention matrices of FLAN-T5-small — that is about 1.4 megabytes of weights — and we keep the base model frozen. QLoRA is wired in but it requires CUDA and bitsandbytes; on a Mac the honest answer is that LoRA is the practical local option.'</a:t>
-            </a:r>
-          </a:p>
-        </p:txBody>
-      </p:sp>
-      <p:sp>
-        <p:nvSpPr>
-          <p:cNvPr id="4" name="Slide Number Placeholder 3"/>
-          <p:cNvSpPr>
-            <a:spLocks noGrp="1"/>
-          </p:cNvSpPr>
-          <p:nvPr>
-            <p:ph type="sldNum" idx="5" sz="quarter"/>
+            <p:ph type="sldNum" sz="quarter" idx="5"/>
           </p:nvPr>
         </p:nvSpPr>
         <p:spPr/>
@@ -976,7 +824,7 @@
 </file>
 
 <file path=ppt/notesSlides/notesSlide7.xml><?xml version="1.0" encoding="utf-8"?>
-<p:notes xmlns:a="http://schemas.openxmlformats.org/drawingml/2006/main" xmlns:p="http://schemas.openxmlformats.org/presentationml/2006/main" xmlns:r="http://schemas.openxmlformats.org/officeDocument/2006/relationships">
+<p:notes xmlns:a="http://schemas.openxmlformats.org/drawingml/2006/main" xmlns:r="http://schemas.openxmlformats.org/officeDocument/2006/relationships" xmlns:p="http://schemas.openxmlformats.org/presentationml/2006/main">
   <p:cSld>
     <p:spTree>
       <p:nvGrpSpPr>
@@ -996,61 +844,75 @@
         <p:nvSpPr>
           <p:cNvPr id="2" name="Slide Image Placeholder 1"/>
           <p:cNvSpPr>
+            <a:spLocks noGrp="1" noRot="1" noChangeAspect="1"/>
+          </p:cNvSpPr>
+          <p:nvPr>
+            <p:ph type="sldImg" idx="2"/>
+          </p:nvPr>
+        </p:nvSpPr>
+        <p:spPr/>
+      </p:sp>
+      <p:sp>
+        <p:nvSpPr>
+          <p:cNvPr id="3" name="Notes Placeholder 2"/>
+          <p:cNvSpPr>
             <a:spLocks noGrp="1"/>
           </p:cNvSpPr>
           <p:nvPr>
-            <p:ph type="sldImg" idx="2"/>
+            <p:ph type="body" sz="quarter" idx="3"/>
           </p:nvPr>
         </p:nvSpPr>
         <p:spPr/>
-      </p:sp>
-      <p:sp>
-        <p:nvSpPr>
-          <p:cNvPr id="3" name="Notes Placeholder 2"/>
+        <p:txBody>
+          <a:bodyPr/>
+          <a:lstStyle/>
+          <a:p>
+            <a:r>
+              <a:t>TIME: ~1 minute (slide 1 of 2 in results).</a:t>
+            </a:r>
+          </a:p>
+          <a:p>
+            <a:endParaRPr/>
+          </a:p>
+          <a:p>
+            <a:r>
+              <a:t>SAY: 'On 25 gold questions, retrieval finds the right document and page in the top-k chunks 96% of the time. The model refused (returned the unsupported sentence) in only 4% of cases, and our heuristic + manual labels show 52% correct answers and 0% hallucinations. BERTScore F1 against the gold answers is 0.77, semantic similarity is 0.61, and the calibration ECE — how well the retrieval confidence score lines up with empirical correctness — is 0.139, which is reasonable for an unblinded run.'</a:t>
+            </a:r>
+          </a:p>
+          <a:p>
+            <a:endParaRPr/>
+          </a:p>
+          <a:p>
+            <a:r>
+              <a:t>BACKUP IF ASKED ABOUT PRECISION/RECALL: 'BERTScore precision is 0.71 and recall is 0.84. Recall higher than precision means our answers cover the gold thoroughly but tend to be a bit verbose — citations, surrounding context, hedging — which lines up with the Partially Correct bucket on the slide-8 heatmap.'</a:t>
+            </a:r>
+          </a:p>
+          <a:p>
+            <a:endParaRPr/>
+          </a:p>
+          <a:p>
+            <a:r>
+              <a:t>SAY: 'For the LoRA experiment we trained for 3 epochs on 99 examples in about 3 minutes on CPU and reached an eval loss of 0.332 and a held-out Jaccard overlap of 0.677 against template-generated gold answers. That is a useful research baseline; we will discuss its limits in a moment.'</a:t>
+            </a:r>
+          </a:p>
+          <a:p>
+            <a:endParaRPr/>
+          </a:p>
+          <a:p>
+            <a:r>
+              <a:t>POINT TO FIGURES: Left chart shows Hit@k bars; explain that Hit@1 vs Hit@10 gap indicates rank quality. Right chart shows calibration buckets — emphasize that low ECE means confidence is honest.</a:t>
+            </a:r>
+          </a:p>
+        </p:txBody>
+      </p:sp>
+      <p:sp>
+        <p:nvSpPr>
+          <p:cNvPr id="4" name="Slide Number Placeholder 3"/>
           <p:cNvSpPr>
             <a:spLocks noGrp="1"/>
           </p:cNvSpPr>
           <p:nvPr>
-            <p:ph type="body" idx="3" sz="quarter"/>
-          </p:nvPr>
-        </p:nvSpPr>
-        <p:spPr/>
-        <p:txBody>
-          <a:bodyPr/>
-          <a:lstStyle/>
-          <a:p>
-            <a:r>
-              <a:t>TIME: ~1 minute (slide 1 of 2 in results).</a:t>
-            </a:r>
-          </a:p>
-          <a:p/>
-          <a:p>
-            <a:r>
-              <a:t>SAY: 'On 25 gold questions, retrieval finds the right document and page in the top-k chunks 96% of the time. The model refused (returned the unsupported sentence) in only 4% of cases, and our heuristic + manual labels show 52% correct answers and 0% hallucinations. BERTScore F1 against the gold answers is 0.77, semantic similarity is 0.61, and the calibration ECE — how well the retrieval confidence score lines up with empirical correctness — is 0.139, which is reasonable for an unblinded run.'</a:t>
-            </a:r>
-          </a:p>
-          <a:p/>
-          <a:p>
-            <a:r>
-              <a:t>SAY: 'For the LoRA experiment we trained for 3 epochs on 94 examples in about 3 minutes on CPU and reached an eval loss of 0.394 and a held-out Jaccard overlap of 0.673 against template-generated gold answers. That is a useful research baseline; we will discuss its limits in a moment.'</a:t>
-            </a:r>
-          </a:p>
-          <a:p/>
-          <a:p>
-            <a:r>
-              <a:t>POINT TO FIGURES: Left chart shows Hit@k bars; explain that Hit@1 vs Hit@10 gap indicates rank quality. Right chart shows calibration buckets — emphasize that low ECE means confidence is honest.</a:t>
-            </a:r>
-          </a:p>
-        </p:txBody>
-      </p:sp>
-      <p:sp>
-        <p:nvSpPr>
-          <p:cNvPr id="4" name="Slide Number Placeholder 3"/>
-          <p:cNvSpPr>
-            <a:spLocks noGrp="1"/>
-          </p:cNvSpPr>
-          <p:nvPr>
-            <p:ph type="sldNum" idx="5" sz="quarter"/>
+            <p:ph type="sldNum" sz="quarter" idx="5"/>
           </p:nvPr>
         </p:nvSpPr>
         <p:spPr/>
@@ -1064,7 +926,7 @@
 </file>
 
 <file path=ppt/notesSlides/notesSlide8.xml><?xml version="1.0" encoding="utf-8"?>
-<p:notes xmlns:a="http://schemas.openxmlformats.org/drawingml/2006/main" xmlns:p="http://schemas.openxmlformats.org/presentationml/2006/main" xmlns:r="http://schemas.openxmlformats.org/officeDocument/2006/relationships">
+<p:notes xmlns:a="http://schemas.openxmlformats.org/drawingml/2006/main" xmlns:r="http://schemas.openxmlformats.org/officeDocument/2006/relationships" xmlns:p="http://schemas.openxmlformats.org/presentationml/2006/main">
   <p:cSld>
     <p:spTree>
       <p:nvGrpSpPr>
@@ -1084,67 +946,75 @@
         <p:nvSpPr>
           <p:cNvPr id="2" name="Slide Image Placeholder 1"/>
           <p:cNvSpPr>
+            <a:spLocks noGrp="1" noRot="1" noChangeAspect="1"/>
+          </p:cNvSpPr>
+          <p:nvPr>
+            <p:ph type="sldImg" idx="2"/>
+          </p:nvPr>
+        </p:nvSpPr>
+        <p:spPr/>
+      </p:sp>
+      <p:sp>
+        <p:nvSpPr>
+          <p:cNvPr id="3" name="Notes Placeholder 2"/>
+          <p:cNvSpPr>
             <a:spLocks noGrp="1"/>
           </p:cNvSpPr>
           <p:nvPr>
-            <p:ph type="sldImg" idx="2"/>
+            <p:ph type="body" sz="quarter" idx="3"/>
           </p:nvPr>
         </p:nvSpPr>
         <p:spPr/>
-      </p:sp>
-      <p:sp>
-        <p:nvSpPr>
-          <p:cNvPr id="3" name="Notes Placeholder 2"/>
+        <p:txBody>
+          <a:bodyPr/>
+          <a:lstStyle/>
+          <a:p>
+            <a:r>
+              <a:t>TIME: ~1 minute (slide 2 of 2 in results).</a:t>
+            </a:r>
+          </a:p>
+          <a:p>
+            <a:endParaRPr/>
+          </a:p>
+          <a:p>
+            <a:r>
+              <a:t>SAY: 'Qualitatively the most informative comparison is the LoRA adapter side-by-side. The base FLAN-T5-small often drifts away from the supplied context and rarely cites the source; the LoRA-adapted version reliably mirrors the training style — answer from context, end with a [doc.pdf p.N] citation. That is exactly the behavior we wanted to teach.'</a:t>
+            </a:r>
+          </a:p>
+          <a:p>
+            <a:endParaRPr/>
+          </a:p>
+          <a:p>
+            <a:r>
+              <a:t>SAY: 'A representative correct refusal: when we ask something the corpus does not cover, the guardrail short-circuits, the answer is the fixed unsupported sentence, and citations stay empty. We log this as grounded=False so we can audit it later.'</a:t>
+            </a:r>
+          </a:p>
+          <a:p>
+            <a:endParaRPr/>
+          </a:p>
+          <a:p>
+            <a:r>
+              <a:t>POINT TO HEATMAP: 'The heatmap on the left is the figure that actually separates retrieval failure from generation failure. The bottom-left cell — retrieval missed but the bot correctly refused — is the guardrail earning its keep. The top-right cell — retrieval succeeded but the bot hallucinated — would be a generation problem; in our run that bucket is empty.'</a:t>
+            </a:r>
+          </a:p>
+          <a:p>
+            <a:endParaRPr/>
+          </a:p>
+          <a:p>
+            <a:r>
+              <a:t>COMPARATIVE: 'With RAG vs without RAG: a raw LLM with no context happily fabricates page numbers and grading weights; with RAG it either cites real text or refuses. With LoRA vs without LoRA: the adapter learned the answer style but cannot replace retrieval for a corpus the user can change at any time.'</a:t>
+            </a:r>
+          </a:p>
+        </p:txBody>
+      </p:sp>
+      <p:sp>
+        <p:nvSpPr>
+          <p:cNvPr id="4" name="Slide Number Placeholder 3"/>
           <p:cNvSpPr>
             <a:spLocks noGrp="1"/>
           </p:cNvSpPr>
           <p:nvPr>
-            <p:ph type="body" idx="3" sz="quarter"/>
-          </p:nvPr>
-        </p:nvSpPr>
-        <p:spPr/>
-        <p:txBody>
-          <a:bodyPr/>
-          <a:lstStyle/>
-          <a:p>
-            <a:r>
-              <a:t>TIME: ~1 minute (slide 2 of 2 in results).</a:t>
-            </a:r>
-          </a:p>
-          <a:p/>
-          <a:p>
-            <a:r>
-              <a:t>SAY: 'Qualitatively the most informative comparison is the LoRA adapter side-by-side. The base FLAN-T5-small often drifts away from the supplied context and rarely cites the source; the LoRA-adapted version reliably mirrors the training style — answer from context, end with a [doc.pdf p.N] citation. That is exactly the behavior we wanted to teach.'</a:t>
-            </a:r>
-          </a:p>
-          <a:p/>
-          <a:p>
-            <a:r>
-              <a:t>SAY: 'A representative correct refusal: when we ask something the corpus does not cover, the guardrail short-circuits, the answer is the fixed unsupported sentence, and citations stay empty. We log this as grounded=False so we can audit it later.'</a:t>
-            </a:r>
-          </a:p>
-          <a:p/>
-          <a:p>
-            <a:r>
-              <a:t>POINT TO HEATMAP: 'The heatmap on the left is the figure that actually separates retrieval failure from generation failure. The bottom-left cell — retrieval missed but the bot correctly refused — is the guardrail earning its keep. The top-right cell — retrieval succeeded but the bot hallucinated — would be a generation problem; in our run that bucket is empty.'</a:t>
-            </a:r>
-          </a:p>
-          <a:p/>
-          <a:p>
-            <a:r>
-              <a:t>COMPARATIVE: 'With RAG vs without RAG: a raw LLM with no context happily fabricates page numbers and grading weights; with RAG it either cites real text or refuses. With LoRA vs without LoRA: the adapter learned the answer style but cannot replace retrieval for a corpus the user can change at any time.'</a:t>
-            </a:r>
-          </a:p>
-        </p:txBody>
-      </p:sp>
-      <p:sp>
-        <p:nvSpPr>
-          <p:cNvPr id="4" name="Slide Number Placeholder 3"/>
-          <p:cNvSpPr>
-            <a:spLocks noGrp="1"/>
-          </p:cNvSpPr>
-          <p:nvPr>
-            <p:ph type="sldNum" idx="5" sz="quarter"/>
+            <p:ph type="sldNum" sz="quarter" idx="5"/>
           </p:nvPr>
         </p:nvSpPr>
         <p:spPr/>
@@ -1158,7 +1028,7 @@
 </file>
 
 <file path=ppt/notesSlides/notesSlide9.xml><?xml version="1.0" encoding="utf-8"?>
-<p:notes xmlns:a="http://schemas.openxmlformats.org/drawingml/2006/main" xmlns:p="http://schemas.openxmlformats.org/presentationml/2006/main" xmlns:r="http://schemas.openxmlformats.org/officeDocument/2006/relationships">
+<p:notes xmlns:a="http://schemas.openxmlformats.org/drawingml/2006/main" xmlns:r="http://schemas.openxmlformats.org/officeDocument/2006/relationships" xmlns:p="http://schemas.openxmlformats.org/presentationml/2006/main">
   <p:cSld>
     <p:spTree>
       <p:nvGrpSpPr>
@@ -1178,67 +1048,75 @@
         <p:nvSpPr>
           <p:cNvPr id="2" name="Slide Image Placeholder 1"/>
           <p:cNvSpPr>
+            <a:spLocks noGrp="1" noRot="1" noChangeAspect="1"/>
+          </p:cNvSpPr>
+          <p:nvPr>
+            <p:ph type="sldImg" idx="2"/>
+          </p:nvPr>
+        </p:nvSpPr>
+        <p:spPr/>
+      </p:sp>
+      <p:sp>
+        <p:nvSpPr>
+          <p:cNvPr id="3" name="Notes Placeholder 2"/>
+          <p:cNvSpPr>
             <a:spLocks noGrp="1"/>
           </p:cNvSpPr>
           <p:nvPr>
-            <p:ph type="sldImg" idx="2"/>
+            <p:ph type="body" sz="quarter" idx="3"/>
           </p:nvPr>
         </p:nvSpPr>
         <p:spPr/>
-      </p:sp>
-      <p:sp>
-        <p:nvSpPr>
-          <p:cNvPr id="3" name="Notes Placeholder 2"/>
+        <p:txBody>
+          <a:bodyPr/>
+          <a:lstStyle/>
+          <a:p>
+            <a:r>
+              <a:t>TIME: ~1 minute (closing slide).</a:t>
+            </a:r>
+          </a:p>
+          <a:p>
+            <a:endParaRPr/>
+          </a:p>
+          <a:p>
+            <a:r>
+              <a:t>REFLECTION: 'Two lessons stood out. First, simple prompt engineering plus a hard confidence threshold did more for trust than any model swap. Second, hybrid retrieval beat dense-only on questions that contained exact course terms.'</a:t>
+            </a:r>
+          </a:p>
+          <a:p>
+            <a:endParaRPr/>
+          </a:p>
+          <a:p>
+            <a:r>
+              <a:t>LIMITATIONS: 'pypdf has no OCR, so any scanned PDF will silently produce empty text. Our heading detector is a regex heuristic and misses unusual layouts. The LoRA experiment is intentionally honest — the QA pairs are template-generated from the chunks, so the adapter mostly learns answer FORMAT rather than new knowledge. And QLoRA would need a CUDA GPU; we ship a readiness check that correctly reports it as unavailable on a Mac.'</a:t>
+            </a:r>
+          </a:p>
+          <a:p>
+            <a:endParaRPr/>
+          </a:p>
+          <a:p>
+            <a:r>
+              <a:t>FUTURE WORK: 'Realistic next steps: add OCR for scanned PDFs, rerank retrieved chunks with a small cross-encoder, run QLoRA on a free Colab T4 for a true 4-bit comparison, and replace the template QA pairs with human-written ones evaluated with BERTScore.'</a:t>
+            </a:r>
+          </a:p>
+          <a:p>
+            <a:endParaRPr/>
+          </a:p>
+          <a:p>
+            <a:r>
+              <a:t>CLOSING SENTENCE: 'Thanks — happy to take questions, especially about the retrieval guardrail or the LoRA-vs-base comparison.'</a:t>
+            </a:r>
+          </a:p>
+        </p:txBody>
+      </p:sp>
+      <p:sp>
+        <p:nvSpPr>
+          <p:cNvPr id="4" name="Slide Number Placeholder 3"/>
           <p:cNvSpPr>
             <a:spLocks noGrp="1"/>
           </p:cNvSpPr>
           <p:nvPr>
-            <p:ph type="body" idx="3" sz="quarter"/>
-          </p:nvPr>
-        </p:nvSpPr>
-        <p:spPr/>
-        <p:txBody>
-          <a:bodyPr/>
-          <a:lstStyle/>
-          <a:p>
-            <a:r>
-              <a:t>TIME: ~1 minute (closing slide).</a:t>
-            </a:r>
-          </a:p>
-          <a:p/>
-          <a:p>
-            <a:r>
-              <a:t>REFLECTION: 'Two lessons stood out. First, simple prompt engineering plus a hard confidence threshold did more for trust than any model swap. Second, hybrid retrieval beat dense-only on questions that contained exact course terms.'</a:t>
-            </a:r>
-          </a:p>
-          <a:p/>
-          <a:p>
-            <a:r>
-              <a:t>LIMITATIONS: 'pypdf has no OCR, so any scanned PDF will silently produce empty text. Our heading detector is a regex heuristic and misses unusual layouts. The LoRA experiment is intentionally honest — the QA pairs are template-generated from the chunks, so the adapter mostly learns answer FORMAT rather than new knowledge. And QLoRA would need a CUDA GPU; we ship a readiness check that correctly reports it as unavailable on a Mac.'</a:t>
-            </a:r>
-          </a:p>
-          <a:p/>
-          <a:p>
-            <a:r>
-              <a:t>FUTURE WORK: 'Realistic next steps: add OCR for scanned PDFs, rerank retrieved chunks with a small cross-encoder, run QLoRA on a free Colab T4 for a true 4-bit comparison, and replace the template QA pairs with human-written ones evaluated with BERTScore.'</a:t>
-            </a:r>
-          </a:p>
-          <a:p/>
-          <a:p>
-            <a:r>
-              <a:t>CLOSING SENTENCE: 'Thanks — happy to take questions, especially about the retrieval guardrail or the LoRA-vs-base comparison.'</a:t>
-            </a:r>
-          </a:p>
-        </p:txBody>
-      </p:sp>
-      <p:sp>
-        <p:nvSpPr>
-          <p:cNvPr id="4" name="Slide Number Placeholder 3"/>
-          <p:cNvSpPr>
-            <a:spLocks noGrp="1"/>
-          </p:cNvSpPr>
-          <p:nvPr>
-            <p:ph type="sldNum" idx="5" sz="quarter"/>
+            <p:ph type="sldNum" sz="quarter" idx="5"/>
           </p:nvPr>
         </p:nvSpPr>
         <p:spPr/>
@@ -1289,10 +1167,9 @@
           <a:lstStyle/>
           <a:p>
             <a:r>
-              <a:rPr lang="en-US" smtClean="0"/>
+              <a:rPr lang="en-US"/>
               <a:t>Click to edit Master title style</a:t>
             </a:r>
-            <a:endParaRPr lang="en-US"/>
           </a:p>
         </p:txBody>
       </p:sp>
@@ -1408,10 +1285,9 @@
           </a:lstStyle>
           <a:p>
             <a:r>
-              <a:rPr lang="en-US" smtClean="0"/>
+              <a:rPr lang="en-US"/>
               <a:t>Click to edit Master subtitle style</a:t>
             </a:r>
-            <a:endParaRPr lang="en-US"/>
           </a:p>
         </p:txBody>
       </p:sp>
@@ -1432,7 +1308,7 @@
           <a:p>
             <a:fld id="{5BCAD085-E8A6-8845-BD4E-CB4CCA059FC4}" type="datetimeFigureOut">
               <a:rPr lang="en-US" smtClean="0"/>
-              <a:t>1/27/13</a:t>
+              <a:t>5/4/26</a:t>
             </a:fld>
             <a:endParaRPr lang="en-US"/>
           </a:p>
@@ -1526,10 +1402,9 @@
           <a:lstStyle/>
           <a:p>
             <a:r>
-              <a:rPr lang="en-US" smtClean="0"/>
+              <a:rPr lang="en-US"/>
               <a:t>Click to edit Master title style</a:t>
             </a:r>
-            <a:endParaRPr lang="en-US"/>
           </a:p>
         </p:txBody>
       </p:sp>
@@ -1550,38 +1425,37 @@
           <a:p>
             <a:pPr lvl="0"/>
             <a:r>
-              <a:rPr lang="en-US" smtClean="0"/>
+              <a:rPr lang="en-US"/>
               <a:t>Click to edit Master text styles</a:t>
             </a:r>
           </a:p>
           <a:p>
             <a:pPr lvl="1"/>
             <a:r>
-              <a:rPr lang="en-US" smtClean="0"/>
+              <a:rPr lang="en-US"/>
               <a:t>Second level</a:t>
             </a:r>
           </a:p>
           <a:p>
             <a:pPr lvl="2"/>
             <a:r>
-              <a:rPr lang="en-US" smtClean="0"/>
+              <a:rPr lang="en-US"/>
               <a:t>Third level</a:t>
             </a:r>
           </a:p>
           <a:p>
             <a:pPr lvl="3"/>
             <a:r>
-              <a:rPr lang="en-US" smtClean="0"/>
+              <a:rPr lang="en-US"/>
               <a:t>Fourth level</a:t>
             </a:r>
           </a:p>
           <a:p>
             <a:pPr lvl="4"/>
             <a:r>
-              <a:rPr lang="en-US" smtClean="0"/>
+              <a:rPr lang="en-US"/>
               <a:t>Fifth level</a:t>
             </a:r>
-            <a:endParaRPr lang="en-US"/>
           </a:p>
         </p:txBody>
       </p:sp>
@@ -1602,7 +1476,7 @@
           <a:p>
             <a:fld id="{5BCAD085-E8A6-8845-BD4E-CB4CCA059FC4}" type="datetimeFigureOut">
               <a:rPr lang="en-US" smtClean="0"/>
-              <a:t>1/27/13</a:t>
+              <a:t>5/4/26</a:t>
             </a:fld>
             <a:endParaRPr lang="en-US"/>
           </a:p>
@@ -1701,10 +1575,9 @@
           <a:lstStyle/>
           <a:p>
             <a:r>
-              <a:rPr lang="en-US" smtClean="0"/>
+              <a:rPr lang="en-US"/>
               <a:t>Click to edit Master title style</a:t>
             </a:r>
-            <a:endParaRPr lang="en-US"/>
           </a:p>
         </p:txBody>
       </p:sp>
@@ -1730,38 +1603,37 @@
           <a:p>
             <a:pPr lvl="0"/>
             <a:r>
-              <a:rPr lang="en-US" smtClean="0"/>
+              <a:rPr lang="en-US"/>
               <a:t>Click to edit Master text styles</a:t>
             </a:r>
           </a:p>
           <a:p>
             <a:pPr lvl="1"/>
             <a:r>
-              <a:rPr lang="en-US" smtClean="0"/>
+              <a:rPr lang="en-US"/>
               <a:t>Second level</a:t>
             </a:r>
           </a:p>
           <a:p>
             <a:pPr lvl="2"/>
             <a:r>
-              <a:rPr lang="en-US" smtClean="0"/>
+              <a:rPr lang="en-US"/>
               <a:t>Third level</a:t>
             </a:r>
           </a:p>
           <a:p>
             <a:pPr lvl="3"/>
             <a:r>
-              <a:rPr lang="en-US" smtClean="0"/>
+              <a:rPr lang="en-US"/>
               <a:t>Fourth level</a:t>
             </a:r>
           </a:p>
           <a:p>
             <a:pPr lvl="4"/>
             <a:r>
-              <a:rPr lang="en-US" smtClean="0"/>
+              <a:rPr lang="en-US"/>
               <a:t>Fifth level</a:t>
             </a:r>
-            <a:endParaRPr lang="en-US"/>
           </a:p>
         </p:txBody>
       </p:sp>
@@ -1782,7 +1654,7 @@
           <a:p>
             <a:fld id="{5BCAD085-E8A6-8845-BD4E-CB4CCA059FC4}" type="datetimeFigureOut">
               <a:rPr lang="en-US" smtClean="0"/>
-              <a:t>1/27/13</a:t>
+              <a:t>5/4/26</a:t>
             </a:fld>
             <a:endParaRPr lang="en-US"/>
           </a:p>
@@ -1876,10 +1748,9 @@
           <a:lstStyle/>
           <a:p>
             <a:r>
-              <a:rPr lang="en-US" smtClean="0"/>
+              <a:rPr lang="en-US"/>
               <a:t>Click to edit Master title style</a:t>
             </a:r>
-            <a:endParaRPr lang="en-US"/>
           </a:p>
         </p:txBody>
       </p:sp>
@@ -1900,38 +1771,37 @@
           <a:p>
             <a:pPr lvl="0"/>
             <a:r>
-              <a:rPr lang="en-US" smtClean="0"/>
+              <a:rPr lang="en-US"/>
               <a:t>Click to edit Master text styles</a:t>
             </a:r>
           </a:p>
           <a:p>
             <a:pPr lvl="1"/>
             <a:r>
-              <a:rPr lang="en-US" smtClean="0"/>
+              <a:rPr lang="en-US"/>
               <a:t>Second level</a:t>
             </a:r>
           </a:p>
           <a:p>
             <a:pPr lvl="2"/>
             <a:r>
-              <a:rPr lang="en-US" smtClean="0"/>
+              <a:rPr lang="en-US"/>
               <a:t>Third level</a:t>
             </a:r>
           </a:p>
           <a:p>
             <a:pPr lvl="3"/>
             <a:r>
-              <a:rPr lang="en-US" smtClean="0"/>
+              <a:rPr lang="en-US"/>
               <a:t>Fourth level</a:t>
             </a:r>
           </a:p>
           <a:p>
             <a:pPr lvl="4"/>
             <a:r>
-              <a:rPr lang="en-US" smtClean="0"/>
+              <a:rPr lang="en-US"/>
               <a:t>Fifth level</a:t>
             </a:r>
-            <a:endParaRPr lang="en-US"/>
           </a:p>
         </p:txBody>
       </p:sp>
@@ -1952,7 +1822,7 @@
           <a:p>
             <a:fld id="{5BCAD085-E8A6-8845-BD4E-CB4CCA059FC4}" type="datetimeFigureOut">
               <a:rPr lang="en-US" smtClean="0"/>
-              <a:t>1/27/13</a:t>
+              <a:t>5/4/26</a:t>
             </a:fld>
             <a:endParaRPr lang="en-US"/>
           </a:p>
@@ -2055,10 +1925,9 @@
           </a:lstStyle>
           <a:p>
             <a:r>
-              <a:rPr lang="en-US" smtClean="0"/>
+              <a:rPr lang="en-US"/>
               <a:t>Click to edit Master title style</a:t>
             </a:r>
-            <a:endParaRPr lang="en-US"/>
           </a:p>
         </p:txBody>
       </p:sp>
@@ -2175,7 +2044,7 @@
           <a:p>
             <a:pPr lvl="0"/>
             <a:r>
-              <a:rPr lang="en-US" smtClean="0"/>
+              <a:rPr lang="en-US"/>
               <a:t>Click to edit Master text styles</a:t>
             </a:r>
           </a:p>
@@ -2198,7 +2067,7 @@
           <a:p>
             <a:fld id="{5BCAD085-E8A6-8845-BD4E-CB4CCA059FC4}" type="datetimeFigureOut">
               <a:rPr lang="en-US" smtClean="0"/>
-              <a:t>1/27/13</a:t>
+              <a:t>5/4/26</a:t>
             </a:fld>
             <a:endParaRPr lang="en-US"/>
           </a:p>
@@ -2292,10 +2161,9 @@
           <a:lstStyle/>
           <a:p>
             <a:r>
-              <a:rPr lang="en-US" smtClean="0"/>
+              <a:rPr lang="en-US"/>
               <a:t>Click to edit Master title style</a:t>
             </a:r>
-            <a:endParaRPr lang="en-US"/>
           </a:p>
         </p:txBody>
       </p:sp>
@@ -2349,38 +2217,37 @@
           <a:p>
             <a:pPr lvl="0"/>
             <a:r>
-              <a:rPr lang="en-US" smtClean="0"/>
+              <a:rPr lang="en-US"/>
               <a:t>Click to edit Master text styles</a:t>
             </a:r>
           </a:p>
           <a:p>
             <a:pPr lvl="1"/>
             <a:r>
-              <a:rPr lang="en-US" smtClean="0"/>
+              <a:rPr lang="en-US"/>
               <a:t>Second level</a:t>
             </a:r>
           </a:p>
           <a:p>
             <a:pPr lvl="2"/>
             <a:r>
-              <a:rPr lang="en-US" smtClean="0"/>
+              <a:rPr lang="en-US"/>
               <a:t>Third level</a:t>
             </a:r>
           </a:p>
           <a:p>
             <a:pPr lvl="3"/>
             <a:r>
-              <a:rPr lang="en-US" smtClean="0"/>
+              <a:rPr lang="en-US"/>
               <a:t>Fourth level</a:t>
             </a:r>
           </a:p>
           <a:p>
             <a:pPr lvl="4"/>
             <a:r>
-              <a:rPr lang="en-US" smtClean="0"/>
+              <a:rPr lang="en-US"/>
               <a:t>Fifth level</a:t>
             </a:r>
-            <a:endParaRPr lang="en-US"/>
           </a:p>
         </p:txBody>
       </p:sp>
@@ -2434,38 +2301,37 @@
           <a:p>
             <a:pPr lvl="0"/>
             <a:r>
-              <a:rPr lang="en-US" smtClean="0"/>
+              <a:rPr lang="en-US"/>
               <a:t>Click to edit Master text styles</a:t>
             </a:r>
           </a:p>
           <a:p>
             <a:pPr lvl="1"/>
             <a:r>
-              <a:rPr lang="en-US" smtClean="0"/>
+              <a:rPr lang="en-US"/>
               <a:t>Second level</a:t>
             </a:r>
           </a:p>
           <a:p>
             <a:pPr lvl="2"/>
             <a:r>
-              <a:rPr lang="en-US" smtClean="0"/>
+              <a:rPr lang="en-US"/>
               <a:t>Third level</a:t>
             </a:r>
           </a:p>
           <a:p>
             <a:pPr lvl="3"/>
             <a:r>
-              <a:rPr lang="en-US" smtClean="0"/>
+              <a:rPr lang="en-US"/>
               <a:t>Fourth level</a:t>
             </a:r>
           </a:p>
           <a:p>
             <a:pPr lvl="4"/>
             <a:r>
-              <a:rPr lang="en-US" smtClean="0"/>
+              <a:rPr lang="en-US"/>
               <a:t>Fifth level</a:t>
             </a:r>
-            <a:endParaRPr lang="en-US"/>
           </a:p>
         </p:txBody>
       </p:sp>
@@ -2486,7 +2352,7 @@
           <a:p>
             <a:fld id="{5BCAD085-E8A6-8845-BD4E-CB4CCA059FC4}" type="datetimeFigureOut">
               <a:rPr lang="en-US" smtClean="0"/>
-              <a:t>1/27/13</a:t>
+              <a:t>5/4/26</a:t>
             </a:fld>
             <a:endParaRPr lang="en-US"/>
           </a:p>
@@ -2584,10 +2450,9 @@
           </a:lstStyle>
           <a:p>
             <a:r>
-              <a:rPr lang="en-US" smtClean="0"/>
+              <a:rPr lang="en-US"/>
               <a:t>Click to edit Master title style</a:t>
             </a:r>
-            <a:endParaRPr lang="en-US"/>
           </a:p>
         </p:txBody>
       </p:sp>
@@ -2650,7 +2515,7 @@
           <a:p>
             <a:pPr lvl="0"/>
             <a:r>
-              <a:rPr lang="en-US" smtClean="0"/>
+              <a:rPr lang="en-US"/>
               <a:t>Click to edit Master text styles</a:t>
             </a:r>
           </a:p>
@@ -2706,38 +2571,37 @@
           <a:p>
             <a:pPr lvl="0"/>
             <a:r>
-              <a:rPr lang="en-US" smtClean="0"/>
+              <a:rPr lang="en-US"/>
               <a:t>Click to edit Master text styles</a:t>
             </a:r>
           </a:p>
           <a:p>
             <a:pPr lvl="1"/>
             <a:r>
-              <a:rPr lang="en-US" smtClean="0"/>
+              <a:rPr lang="en-US"/>
               <a:t>Second level</a:t>
             </a:r>
           </a:p>
           <a:p>
             <a:pPr lvl="2"/>
             <a:r>
-              <a:rPr lang="en-US" smtClean="0"/>
+              <a:rPr lang="en-US"/>
               <a:t>Third level</a:t>
             </a:r>
           </a:p>
           <a:p>
             <a:pPr lvl="3"/>
             <a:r>
-              <a:rPr lang="en-US" smtClean="0"/>
+              <a:rPr lang="en-US"/>
               <a:t>Fourth level</a:t>
             </a:r>
           </a:p>
           <a:p>
             <a:pPr lvl="4"/>
             <a:r>
-              <a:rPr lang="en-US" smtClean="0"/>
+              <a:rPr lang="en-US"/>
               <a:t>Fifth level</a:t>
             </a:r>
-            <a:endParaRPr lang="en-US"/>
           </a:p>
         </p:txBody>
       </p:sp>
@@ -2800,7 +2664,7 @@
           <a:p>
             <a:pPr lvl="0"/>
             <a:r>
-              <a:rPr lang="en-US" smtClean="0"/>
+              <a:rPr lang="en-US"/>
               <a:t>Click to edit Master text styles</a:t>
             </a:r>
           </a:p>
@@ -2856,38 +2720,37 @@
           <a:p>
             <a:pPr lvl="0"/>
             <a:r>
-              <a:rPr lang="en-US" smtClean="0"/>
+              <a:rPr lang="en-US"/>
               <a:t>Click to edit Master text styles</a:t>
             </a:r>
           </a:p>
           <a:p>
             <a:pPr lvl="1"/>
             <a:r>
-              <a:rPr lang="en-US" smtClean="0"/>
+              <a:rPr lang="en-US"/>
               <a:t>Second level</a:t>
             </a:r>
           </a:p>
           <a:p>
             <a:pPr lvl="2"/>
             <a:r>
-              <a:rPr lang="en-US" smtClean="0"/>
+              <a:rPr lang="en-US"/>
               <a:t>Third level</a:t>
             </a:r>
           </a:p>
           <a:p>
             <a:pPr lvl="3"/>
             <a:r>
-              <a:rPr lang="en-US" smtClean="0"/>
+              <a:rPr lang="en-US"/>
               <a:t>Fourth level</a:t>
             </a:r>
           </a:p>
           <a:p>
             <a:pPr lvl="4"/>
             <a:r>
-              <a:rPr lang="en-US" smtClean="0"/>
+              <a:rPr lang="en-US"/>
               <a:t>Fifth level</a:t>
             </a:r>
-            <a:endParaRPr lang="en-US"/>
           </a:p>
         </p:txBody>
       </p:sp>
@@ -2908,7 +2771,7 @@
           <a:p>
             <a:fld id="{5BCAD085-E8A6-8845-BD4E-CB4CCA059FC4}" type="datetimeFigureOut">
               <a:rPr lang="en-US" smtClean="0"/>
-              <a:t>1/27/13</a:t>
+              <a:t>5/4/26</a:t>
             </a:fld>
             <a:endParaRPr lang="en-US"/>
           </a:p>
@@ -3002,10 +2865,9 @@
           <a:lstStyle/>
           <a:p>
             <a:r>
-              <a:rPr lang="en-US" smtClean="0"/>
+              <a:rPr lang="en-US"/>
               <a:t>Click to edit Master title style</a:t>
             </a:r>
-            <a:endParaRPr lang="en-US"/>
           </a:p>
         </p:txBody>
       </p:sp>
@@ -3026,7 +2888,7 @@
           <a:p>
             <a:fld id="{5BCAD085-E8A6-8845-BD4E-CB4CCA059FC4}" type="datetimeFigureOut">
               <a:rPr lang="en-US" smtClean="0"/>
-              <a:t>1/27/13</a:t>
+              <a:t>5/4/26</a:t>
             </a:fld>
             <a:endParaRPr lang="en-US"/>
           </a:p>
@@ -3121,7 +2983,7 @@
           <a:p>
             <a:fld id="{5BCAD085-E8A6-8845-BD4E-CB4CCA059FC4}" type="datetimeFigureOut">
               <a:rPr lang="en-US" smtClean="0"/>
-              <a:t>1/27/13</a:t>
+              <a:t>5/4/26</a:t>
             </a:fld>
             <a:endParaRPr lang="en-US"/>
           </a:p>
@@ -3224,10 +3086,9 @@
           </a:lstStyle>
           <a:p>
             <a:r>
-              <a:rPr lang="en-US" smtClean="0"/>
+              <a:rPr lang="en-US"/>
               <a:t>Click to edit Master title style</a:t>
             </a:r>
-            <a:endParaRPr lang="en-US"/>
           </a:p>
         </p:txBody>
       </p:sp>
@@ -3281,38 +3142,37 @@
           <a:p>
             <a:pPr lvl="0"/>
             <a:r>
-              <a:rPr lang="en-US" smtClean="0"/>
+              <a:rPr lang="en-US"/>
               <a:t>Click to edit Master text styles</a:t>
             </a:r>
           </a:p>
           <a:p>
             <a:pPr lvl="1"/>
             <a:r>
-              <a:rPr lang="en-US" smtClean="0"/>
+              <a:rPr lang="en-US"/>
               <a:t>Second level</a:t>
             </a:r>
           </a:p>
           <a:p>
             <a:pPr lvl="2"/>
             <a:r>
-              <a:rPr lang="en-US" smtClean="0"/>
+              <a:rPr lang="en-US"/>
               <a:t>Third level</a:t>
             </a:r>
           </a:p>
           <a:p>
             <a:pPr lvl="3"/>
             <a:r>
-              <a:rPr lang="en-US" smtClean="0"/>
+              <a:rPr lang="en-US"/>
               <a:t>Fourth level</a:t>
             </a:r>
           </a:p>
           <a:p>
             <a:pPr lvl="4"/>
             <a:r>
-              <a:rPr lang="en-US" smtClean="0"/>
+              <a:rPr lang="en-US"/>
               <a:t>Fifth level</a:t>
             </a:r>
-            <a:endParaRPr lang="en-US"/>
           </a:p>
         </p:txBody>
       </p:sp>
@@ -3375,7 +3235,7 @@
           <a:p>
             <a:pPr lvl="0"/>
             <a:r>
-              <a:rPr lang="en-US" smtClean="0"/>
+              <a:rPr lang="en-US"/>
               <a:t>Click to edit Master text styles</a:t>
             </a:r>
           </a:p>
@@ -3398,7 +3258,7 @@
           <a:p>
             <a:fld id="{5BCAD085-E8A6-8845-BD4E-CB4CCA059FC4}" type="datetimeFigureOut">
               <a:rPr lang="en-US" smtClean="0"/>
-              <a:t>1/27/13</a:t>
+              <a:t>5/4/26</a:t>
             </a:fld>
             <a:endParaRPr lang="en-US"/>
           </a:p>
@@ -3501,10 +3361,9 @@
           </a:lstStyle>
           <a:p>
             <a:r>
-              <a:rPr lang="en-US" smtClean="0"/>
+              <a:rPr lang="en-US"/>
               <a:t>Click to edit Master title style</a:t>
             </a:r>
-            <a:endParaRPr lang="en-US"/>
           </a:p>
         </p:txBody>
       </p:sp>
@@ -3628,7 +3487,7 @@
           <a:p>
             <a:pPr lvl="0"/>
             <a:r>
-              <a:rPr lang="en-US" smtClean="0"/>
+              <a:rPr lang="en-US"/>
               <a:t>Click to edit Master text styles</a:t>
             </a:r>
           </a:p>
@@ -3651,7 +3510,7 @@
           <a:p>
             <a:fld id="{5BCAD085-E8A6-8845-BD4E-CB4CCA059FC4}" type="datetimeFigureOut">
               <a:rPr lang="en-US" smtClean="0"/>
-              <a:t>1/27/13</a:t>
+              <a:t>5/4/26</a:t>
             </a:fld>
             <a:endParaRPr lang="en-US"/>
           </a:p>
@@ -3760,10 +3619,9 @@
           <a:lstStyle/>
           <a:p>
             <a:r>
-              <a:rPr lang="en-US" smtClean="0"/>
+              <a:rPr lang="en-US"/>
               <a:t>Click to edit Master title style</a:t>
             </a:r>
-            <a:endParaRPr lang="en-US"/>
           </a:p>
         </p:txBody>
       </p:sp>
@@ -3794,38 +3652,37 @@
           <a:p>
             <a:pPr lvl="0"/>
             <a:r>
-              <a:rPr lang="en-US" smtClean="0"/>
+              <a:rPr lang="en-US"/>
               <a:t>Click to edit Master text styles</a:t>
             </a:r>
           </a:p>
           <a:p>
             <a:pPr lvl="1"/>
             <a:r>
-              <a:rPr lang="en-US" smtClean="0"/>
+              <a:rPr lang="en-US"/>
               <a:t>Second level</a:t>
             </a:r>
           </a:p>
           <a:p>
             <a:pPr lvl="2"/>
             <a:r>
-              <a:rPr lang="en-US" smtClean="0"/>
+              <a:rPr lang="en-US"/>
               <a:t>Third level</a:t>
             </a:r>
           </a:p>
           <a:p>
             <a:pPr lvl="3"/>
             <a:r>
-              <a:rPr lang="en-US" smtClean="0"/>
+              <a:rPr lang="en-US"/>
               <a:t>Fourth level</a:t>
             </a:r>
           </a:p>
           <a:p>
             <a:pPr lvl="4"/>
             <a:r>
-              <a:rPr lang="en-US" smtClean="0"/>
+              <a:rPr lang="en-US"/>
               <a:t>Fifth level</a:t>
             </a:r>
-            <a:endParaRPr lang="en-US"/>
           </a:p>
         </p:txBody>
       </p:sp>
@@ -3864,7 +3721,7 @@
           <a:p>
             <a:fld id="{5BCAD085-E8A6-8845-BD4E-CB4CCA059FC4}" type="datetimeFigureOut">
               <a:rPr lang="en-US" smtClean="0"/>
-              <a:t>1/27/13</a:t>
+              <a:t>5/4/26</a:t>
             </a:fld>
             <a:endParaRPr lang="en-US"/>
           </a:p>
@@ -4223,7 +4080,7 @@
 </file>
 
 <file path=ppt/slides/slide1.xml><?xml version="1.0" encoding="utf-8"?>
-<p:sld xmlns:a="http://schemas.openxmlformats.org/drawingml/2006/main" xmlns:p="http://schemas.openxmlformats.org/presentationml/2006/main" xmlns:r="http://schemas.openxmlformats.org/officeDocument/2006/relationships">
+<p:sld xmlns:a="http://schemas.openxmlformats.org/drawingml/2006/main" xmlns:r="http://schemas.openxmlformats.org/officeDocument/2006/relationships" xmlns:p="http://schemas.openxmlformats.org/presentationml/2006/main">
   <p:cSld>
     <p:spTree>
       <p:nvGrpSpPr>
@@ -4231,7 +4088,14 @@
         <p:cNvGrpSpPr/>
         <p:nvPr/>
       </p:nvGrpSpPr>
-      <p:grpSpPr/>
+      <p:grpSpPr>
+        <a:xfrm>
+          <a:off x="0" y="0"/>
+          <a:ext cx="0" cy="0"/>
+          <a:chOff x="0" y="0"/>
+          <a:chExt cx="0" cy="0"/>
+        </a:xfrm>
+      </p:grpSpPr>
       <p:sp>
         <p:nvSpPr>
           <p:cNvPr id="2" name="Rectangle 1"/>
@@ -4272,6 +4136,7 @@
           <a:lstStyle/>
           <a:p>
             <a:pPr algn="ctr"/>
+            <a:endParaRPr/>
           </a:p>
         </p:txBody>
       </p:sp>
@@ -4413,7 +4278,7 @@
 </file>
 
 <file path=ppt/slides/slide2.xml><?xml version="1.0" encoding="utf-8"?>
-<p:sld xmlns:a="http://schemas.openxmlformats.org/drawingml/2006/main" xmlns:p="http://schemas.openxmlformats.org/presentationml/2006/main" xmlns:r="http://schemas.openxmlformats.org/officeDocument/2006/relationships">
+<p:sld xmlns:a="http://schemas.openxmlformats.org/drawingml/2006/main" xmlns:r="http://schemas.openxmlformats.org/officeDocument/2006/relationships" xmlns:p="http://schemas.openxmlformats.org/presentationml/2006/main">
   <p:cSld>
     <p:spTree>
       <p:nvGrpSpPr>
@@ -4421,7 +4286,14 @@
         <p:cNvGrpSpPr/>
         <p:nvPr/>
       </p:nvGrpSpPr>
-      <p:grpSpPr/>
+      <p:grpSpPr>
+        <a:xfrm>
+          <a:off x="0" y="0"/>
+          <a:ext cx="0" cy="0"/>
+          <a:chOff x="0" y="0"/>
+          <a:chExt cx="0" cy="0"/>
+        </a:xfrm>
+      </p:grpSpPr>
       <p:sp>
         <p:nvSpPr>
           <p:cNvPr id="2" name="Rectangle 1"/>
@@ -4462,6 +4334,7 @@
           <a:lstStyle/>
           <a:p>
             <a:pPr algn="ctr"/>
+            <a:endParaRPr/>
           </a:p>
         </p:txBody>
       </p:sp>
@@ -4607,7 +4480,7 @@
 </file>
 
 <file path=ppt/slides/slide3.xml><?xml version="1.0" encoding="utf-8"?>
-<p:sld xmlns:a="http://schemas.openxmlformats.org/drawingml/2006/main" xmlns:p="http://schemas.openxmlformats.org/presentationml/2006/main" xmlns:r="http://schemas.openxmlformats.org/officeDocument/2006/relationships">
+<p:sld xmlns:a="http://schemas.openxmlformats.org/drawingml/2006/main" xmlns:r="http://schemas.openxmlformats.org/officeDocument/2006/relationships" xmlns:p="http://schemas.openxmlformats.org/presentationml/2006/main">
   <p:cSld>
     <p:spTree>
       <p:nvGrpSpPr>
@@ -4615,7 +4488,14 @@
         <p:cNvGrpSpPr/>
         <p:nvPr/>
       </p:nvGrpSpPr>
-      <p:grpSpPr/>
+      <p:grpSpPr>
+        <a:xfrm>
+          <a:off x="0" y="0"/>
+          <a:ext cx="0" cy="0"/>
+          <a:chOff x="0" y="0"/>
+          <a:chExt cx="0" cy="0"/>
+        </a:xfrm>
+      </p:grpSpPr>
       <p:sp>
         <p:nvSpPr>
           <p:cNvPr id="2" name="Rectangle 1"/>
@@ -4656,6 +4536,7 @@
           <a:lstStyle/>
           <a:p>
             <a:pPr algn="ctr"/>
+            <a:endParaRPr/>
           </a:p>
         </p:txBody>
       </p:sp>
@@ -4801,7 +4682,7 @@
 </file>
 
 <file path=ppt/slides/slide4.xml><?xml version="1.0" encoding="utf-8"?>
-<p:sld xmlns:a="http://schemas.openxmlformats.org/drawingml/2006/main" xmlns:p="http://schemas.openxmlformats.org/presentationml/2006/main" xmlns:r="http://schemas.openxmlformats.org/officeDocument/2006/relationships">
+<p:sld xmlns:a="http://schemas.openxmlformats.org/drawingml/2006/main" xmlns:r="http://schemas.openxmlformats.org/officeDocument/2006/relationships" xmlns:p="http://schemas.openxmlformats.org/presentationml/2006/main">
   <p:cSld>
     <p:spTree>
       <p:nvGrpSpPr>
@@ -4809,7 +4690,14 @@
         <p:cNvGrpSpPr/>
         <p:nvPr/>
       </p:nvGrpSpPr>
-      <p:grpSpPr/>
+      <p:grpSpPr>
+        <a:xfrm>
+          <a:off x="0" y="0"/>
+          <a:ext cx="0" cy="0"/>
+          <a:chOff x="0" y="0"/>
+          <a:chExt cx="0" cy="0"/>
+        </a:xfrm>
+      </p:grpSpPr>
       <p:sp>
         <p:nvSpPr>
           <p:cNvPr id="2" name="Rectangle 1"/>
@@ -4850,6 +4738,7 @@
           <a:lstStyle/>
           <a:p>
             <a:pPr algn="ctr"/>
+            <a:endParaRPr/>
           </a:p>
         </p:txBody>
       </p:sp>
@@ -4897,7 +4786,7 @@
         <p:spPr>
           <a:xfrm>
             <a:off x="457200" y="1097280"/>
-            <a:ext cx="11247120" cy="5212080"/>
+            <a:ext cx="11247120" cy="2682786"/>
           </a:xfrm>
           <a:prstGeom prst="rect">
             <a:avLst/>
@@ -4921,8 +4810,38 @@
               </a:defRPr>
             </a:pPr>
             <a:r>
-              <a:t>Source: 4 real CSE 534 course PDFs uploaded into the app — Syllabus, Project Requirement, Midterm Project Check, and Final Project Presentation Guideline.</a:t>
-            </a:r>
+              <a:rPr sz="1500" dirty="0"/>
+              <a:t>Source: </a:t>
+            </a:r>
+            <a:r>
+              <a:rPr lang="en-US" sz="1500" dirty="0"/>
+              <a:t>PDF </a:t>
+            </a:r>
+            <a:r>
+              <a:rPr lang="en-US" sz="1500" dirty="0" err="1"/>
+              <a:t>uploadable</a:t>
+            </a:r>
+            <a:r>
+              <a:rPr lang="en-US" sz="1500" dirty="0"/>
+              <a:t> by the User. ( for example, during test: </a:t>
+            </a:r>
+            <a:r>
+              <a:rPr sz="1500" dirty="0"/>
+              <a:t>CSE 534 course PDFs uploaded into the app </a:t>
+            </a:r>
+            <a:r>
+              <a:rPr lang="en-US" sz="1500" dirty="0"/>
+              <a:t>=&gt; </a:t>
+            </a:r>
+            <a:r>
+              <a:rPr sz="1500" dirty="0"/>
+              <a:t>Syllabus, Project Requirement, Midterm Project Check, and Final Project Presentation Guideline.</a:t>
+            </a:r>
+            <a:r>
+              <a:rPr lang="en-US" sz="1500" dirty="0"/>
+              <a:t>)</a:t>
+            </a:r>
+            <a:endParaRPr sz="1500" dirty="0"/>
           </a:p>
           <a:p>
             <a:pPr>
@@ -4936,7 +4855,28 @@
               </a:defRPr>
             </a:pPr>
             <a:r>
-              <a:t>Preprocessing: pypdf page extraction → whitespace cleanup → heading-aware section splitting → recursive char split (chunk_size 800, overlap 150) → tiny-chunk merge (min 250 chars).</a:t>
+              <a:rPr sz="1500" dirty="0"/>
+              <a:t>Preprocessing: </a:t>
+            </a:r>
+            <a:r>
+              <a:rPr sz="1500" dirty="0" err="1"/>
+              <a:t>py</a:t>
+            </a:r>
+            <a:r>
+              <a:rPr lang="en-US" sz="1500" dirty="0"/>
+              <a:t>-</a:t>
+            </a:r>
+            <a:r>
+              <a:rPr sz="1500" dirty="0"/>
+              <a:t>pdf page extraction → whitespace cleanup → heading-aware section splitting → recursive char split (</a:t>
+            </a:r>
+            <a:r>
+              <a:rPr sz="1500" dirty="0" err="1"/>
+              <a:t>chunk_size</a:t>
+            </a:r>
+            <a:r>
+              <a:rPr sz="1500" dirty="0"/>
+              <a:t> 800, overlap 150) → tiny-chunk merge (min 250 chars).</a:t>
             </a:r>
           </a:p>
           <a:p>
@@ -4951,7 +4891,16 @@
               </a:defRPr>
             </a:pPr>
             <a:r>
-              <a:t>Indexed corpus: 4 PDFs, dozens of chunks, embedded with sentence-transformers all-MiniLM-L6-v2 (384-d) into a FAISS IndexFlatIP.</a:t>
+              <a:rPr sz="1500" dirty="0"/>
+              <a:t>Indexed corpus: 4 PDFs, dozens of chunks, embedded with sentence-transformers all-MiniLM-L6-v2 into a FAISS </a:t>
+            </a:r>
+            <a:r>
+              <a:rPr sz="1500" dirty="0" err="1"/>
+              <a:t>IndexFlatIP</a:t>
+            </a:r>
+            <a:r>
+              <a:rPr sz="1500" dirty="0"/>
+              <a:t>.</a:t>
             </a:r>
           </a:p>
           <a:p>
@@ -4966,7 +4915,40 @@
               </a:defRPr>
             </a:pPr>
             <a:r>
-              <a:t>Evaluation set: a 25-question gold CSV (eval/sample_eval_questions.csv) with question, gold_answer, gold_doc, gold_page columns.</a:t>
+              <a:rPr sz="1500" dirty="0"/>
+              <a:t>Evaluation set: a 25-question gold CSV (eval/</a:t>
+            </a:r>
+            <a:r>
+              <a:rPr sz="1500" dirty="0" err="1"/>
+              <a:t>sample_eval_questions.csv</a:t>
+            </a:r>
+            <a:r>
+              <a:rPr sz="1500" dirty="0"/>
+              <a:t>) with question, </a:t>
+            </a:r>
+            <a:r>
+              <a:rPr sz="1500" dirty="0" err="1"/>
+              <a:t>gold_answer</a:t>
+            </a:r>
+            <a:r>
+              <a:rPr sz="1500" dirty="0"/>
+              <a:t>, </a:t>
+            </a:r>
+            <a:r>
+              <a:rPr sz="1500" dirty="0" err="1"/>
+              <a:t>gold_doc</a:t>
+            </a:r>
+            <a:r>
+              <a:rPr sz="1500" dirty="0"/>
+              <a:t>, </a:t>
+            </a:r>
+            <a:r>
+              <a:rPr sz="1500" dirty="0" err="1"/>
+              <a:t>gold_page</a:t>
+            </a:r>
+            <a:r>
+              <a:rPr sz="1500" dirty="0"/>
+              <a:t> columns.</a:t>
             </a:r>
           </a:p>
           <a:p>
@@ -4981,7 +4963,12 @@
               </a:defRPr>
             </a:pPr>
             <a:r>
-              <a:t>LoRA fine-tuning data: 117 template-based grounded QA pairs auto-generated from the indexed chunks (94 train / 23 eval, fixed seed for reproducibility).</a:t>
+              <a:rPr sz="1500" dirty="0" err="1"/>
+              <a:t>LoRA</a:t>
+            </a:r>
+            <a:r>
+              <a:rPr sz="1500" dirty="0"/>
+              <a:t> fine-tuning data: 117 template-based grounded QA pairs auto-generated from the indexed chunks (94 train / 23 eval, fixed seed for reproducibility).</a:t>
             </a:r>
           </a:p>
           <a:p>
@@ -4996,7 +4983,144 @@
               </a:defRPr>
             </a:pPr>
             <a:r>
+              <a:rPr sz="1500" dirty="0"/>
               <a:t>Ethics: only user-uploaded course PDFs (no scraping); all retrieval runs locally; only the LLM call leaves the machine.</a:t>
+            </a:r>
+          </a:p>
+        </p:txBody>
+      </p:sp>
+      <p:pic>
+        <p:nvPicPr>
+          <p:cNvPr id="5" name="Picture 4" descr="fig1_chunks_per_doc.png">
+            <a:extLst>
+              <a:ext uri="{FF2B5EF4-FFF2-40B4-BE49-F238E27FC236}">
+                <a16:creationId xmlns:a16="http://schemas.microsoft.com/office/drawing/2014/main" id="{74E5D170-261B-A7D3-1224-FCB6B1E03F98}"/>
+              </a:ext>
+            </a:extLst>
+          </p:cNvPr>
+          <p:cNvPicPr>
+            <a:picLocks noChangeAspect="1"/>
+          </p:cNvPicPr>
+          <p:nvPr/>
+        </p:nvPicPr>
+        <p:blipFill>
+          <a:blip r:embed="rId3"/>
+          <a:stretch>
+            <a:fillRect/>
+          </a:stretch>
+        </p:blipFill>
+        <p:spPr>
+          <a:xfrm>
+            <a:off x="548640" y="3908063"/>
+            <a:ext cx="6199668" cy="2651760"/>
+          </a:xfrm>
+          <a:prstGeom prst="rect">
+            <a:avLst/>
+          </a:prstGeom>
+        </p:spPr>
+      </p:pic>
+      <p:sp>
+        <p:nvSpPr>
+          <p:cNvPr id="6" name="TextBox 5">
+            <a:extLst>
+              <a:ext uri="{FF2B5EF4-FFF2-40B4-BE49-F238E27FC236}">
+                <a16:creationId xmlns:a16="http://schemas.microsoft.com/office/drawing/2014/main" id="{BB0A4593-1870-5DC8-7909-F1B023A1FCEF}"/>
+              </a:ext>
+            </a:extLst>
+          </p:cNvPr>
+          <p:cNvSpPr txBox="1"/>
+          <p:nvPr/>
+        </p:nvSpPr>
+        <p:spPr>
+          <a:xfrm>
+            <a:off x="6949440" y="4146602"/>
+            <a:ext cx="4846320" cy="954107"/>
+          </a:xfrm>
+          <a:prstGeom prst="rect">
+            <a:avLst/>
+          </a:prstGeom>
+          <a:noFill/>
+        </p:spPr>
+        <p:txBody>
+          <a:bodyPr wrap="square">
+            <a:spAutoFit/>
+          </a:bodyPr>
+          <a:lstStyle/>
+          <a:p>
+            <a:pPr>
+              <a:defRPr sz="1400" b="1">
+                <a:solidFill>
+                  <a:srgbClr val="222222"/>
+                </a:solidFill>
+              </a:defRPr>
+            </a:pPr>
+            <a:r>
+              <a:rPr dirty="0"/>
+              <a:t>Stack at a glance:</a:t>
+            </a:r>
+          </a:p>
+          <a:p>
+            <a:pPr>
+              <a:defRPr sz="1400">
+                <a:solidFill>
+                  <a:srgbClr val="222222"/>
+                </a:solidFill>
+              </a:defRPr>
+            </a:pPr>
+            <a:r>
+              <a:rPr dirty="0"/>
+              <a:t>• Embeddings: sentence-transformers </a:t>
+            </a:r>
+            <a:r>
+              <a:rPr lang="en-US" dirty="0"/>
+              <a:t>(</a:t>
+            </a:r>
+            <a:r>
+              <a:rPr lang="en-US" sz="1400" dirty="0"/>
+              <a:t>all-MiniLM-L6-v2)</a:t>
+            </a:r>
+            <a:endParaRPr dirty="0"/>
+          </a:p>
+          <a:p>
+            <a:pPr>
+              <a:defRPr sz="1400">
+                <a:solidFill>
+                  <a:srgbClr val="222222"/>
+                </a:solidFill>
+              </a:defRPr>
+            </a:pPr>
+            <a:r>
+              <a:rPr dirty="0"/>
+              <a:t>• Index: FAISS </a:t>
+            </a:r>
+            <a:r>
+              <a:rPr dirty="0" err="1"/>
+              <a:t>IndexFlatIP</a:t>
+            </a:r>
+            <a:r>
+              <a:rPr dirty="0"/>
+              <a:t> —</a:t>
+            </a:r>
+            <a:r>
+              <a:rPr lang="en-US" dirty="0"/>
+              <a:t>&gt;</a:t>
+            </a:r>
+            <a:r>
+              <a:rPr dirty="0"/>
+              <a:t> exact search at this scale.</a:t>
+            </a:r>
+          </a:p>
+          <a:p>
+            <a:pPr>
+              <a:defRPr sz="1400">
+                <a:solidFill>
+                  <a:srgbClr val="222222"/>
+                </a:solidFill>
+              </a:defRPr>
+            </a:pPr>
+            <a:r>
+              <a:rPr dirty="0"/>
+              <a:t>• Retrieval: Dense FAISS, sparse BM25, or hybrid score fusion.</a:t>
             </a:r>
           </a:p>
         </p:txBody>
@@ -5010,7 +5134,7 @@
 </file>
 
 <file path=ppt/slides/slide5.xml><?xml version="1.0" encoding="utf-8"?>
-<p:sld xmlns:a="http://schemas.openxmlformats.org/drawingml/2006/main" xmlns:p="http://schemas.openxmlformats.org/presentationml/2006/main" xmlns:r="http://schemas.openxmlformats.org/officeDocument/2006/relationships">
+<p:sld xmlns:a="http://schemas.openxmlformats.org/drawingml/2006/main" xmlns:r="http://schemas.openxmlformats.org/officeDocument/2006/relationships" xmlns:p="http://schemas.openxmlformats.org/presentationml/2006/main">
   <p:cSld>
     <p:spTree>
       <p:nvGrpSpPr>
@@ -5018,7 +5142,14 @@
         <p:cNvGrpSpPr/>
         <p:nvPr/>
       </p:nvGrpSpPr>
-      <p:grpSpPr/>
+      <p:grpSpPr>
+        <a:xfrm>
+          <a:off x="0" y="0"/>
+          <a:ext cx="0" cy="0"/>
+          <a:chOff x="0" y="0"/>
+          <a:chExt cx="0" cy="0"/>
+        </a:xfrm>
+      </p:grpSpPr>
       <p:sp>
         <p:nvSpPr>
           <p:cNvPr id="2" name="Rectangle 1"/>
@@ -5059,6 +5190,7 @@
           <a:lstStyle/>
           <a:p>
             <a:pPr algn="ctr"/>
+            <a:endParaRPr/>
           </a:p>
         </p:txBody>
       </p:sp>
@@ -5105,8 +5237,8 @@
         </p:nvSpPr>
         <p:spPr>
           <a:xfrm>
-            <a:off x="457200" y="1005840"/>
-            <a:ext cx="11247120" cy="2377440"/>
+            <a:off x="457200" y="960120"/>
+            <a:ext cx="11247120" cy="1554480"/>
           </a:xfrm>
           <a:prstGeom prst="rect">
             <a:avLst/>
@@ -5123,14 +5255,14 @@
               <a:spcAft>
                 <a:spcPts val="800"/>
               </a:spcAft>
-              <a:defRPr sz="1600">
+              <a:defRPr sz="1400">
                 <a:solidFill>
                   <a:srgbClr val="222222"/>
                 </a:solidFill>
               </a:defRPr>
             </a:pPr>
             <a:r>
-              <a:t>INGEST: PDFs → pypdf pages → heading-aware + recursive chunker → sentence-transformers embedder → FAISS IndexFlatIP (L2-normalized, persisted on disk).</a:t>
+              <a:t>INGEST (top row) — each PDF is split into section-aware chunks, embedded with all-MiniLM-L6-v2, and stored as L2-normalized vectors in a FAISS index.</a:t>
             </a:r>
           </a:p>
           <a:p>
@@ -5138,14 +5270,14 @@
               <a:spcAft>
                 <a:spcPts val="800"/>
               </a:spcAft>
-              <a:defRPr sz="1600">
+              <a:defRPr sz="1400">
                 <a:solidFill>
                   <a:srgbClr val="222222"/>
                 </a:solidFill>
               </a:defRPr>
             </a:pPr>
             <a:r>
-              <a:t>QUERY: question → embed with same model → retrieve top-k chunks (Dense FAISS / BM25 / Hybrid α-fusion) → confidence guardrail (min_score) → strict prompt → Gemini or OpenAI → grounded answer + citations.</a:t>
+              <a:t>QUERY (bottom row) — the same model embeds the question; top-k chunks are retrieved (dense / BM25 / hybrid) and a confidence guardrail short-circuits the LLM call when retrieval is weak.</a:t>
             </a:r>
           </a:p>
           <a:p>
@@ -5153,67 +5285,28 @@
               <a:spcAft>
                 <a:spcPts val="800"/>
               </a:spcAft>
-              <a:defRPr sz="1600">
+              <a:defRPr sz="1400">
                 <a:solidFill>
                   <a:srgbClr val="222222"/>
                 </a:solidFill>
               </a:defRPr>
             </a:pPr>
             <a:r>
-              <a:t>FOUR-TAB UI: Chat (ask), Documents/Index (curate), Evaluation (measure + label + 6 figures), LoRA/QLoRA (fine-tune + try the adapter).</a:t>
-            </a:r>
-          </a:p>
-          <a:p>
-            <a:pPr>
-              <a:spcAft>
-                <a:spcPts val="800"/>
-              </a:spcAft>
-              <a:defRPr sz="1600">
-                <a:solidFill>
-                  <a:srgbClr val="222222"/>
-                </a:solidFill>
-              </a:defRPr>
-            </a:pPr>
-            <a:r>
-              <a:t>REPRODUCIBILITY: indexes/manifest.json records embedding model, chunk size, document set, build time. Switching the embedding model auto-resets the stale index.</a:t>
-            </a:r>
-          </a:p>
-        </p:txBody>
-      </p:sp>
-      <p:pic>
-        <p:nvPicPr>
-          <p:cNvPr id="5" name="Picture 4" descr="fig1_chunks_per_doc.png"/>
-          <p:cNvPicPr>
-            <a:picLocks noChangeAspect="1"/>
-          </p:cNvPicPr>
+              <a:t>GENERATE — only the retrieved chunks plus the question reach the LLM under a strict context-only prompt that forces citations as [filename p.PAGE].</a:t>
+            </a:r>
+          </a:p>
+        </p:txBody>
+      </p:sp>
+      <p:sp>
+        <p:nvSpPr>
+          <p:cNvPr id="5" name="TextBox 4"/>
+          <p:cNvSpPr txBox="1"/>
           <p:nvPr/>
-        </p:nvPicPr>
-        <p:blipFill>
-          <a:blip r:embed="rId2"/>
-          <a:stretch>
-            <a:fillRect/>
-          </a:stretch>
-        </p:blipFill>
+        </p:nvSpPr>
         <p:spPr>
           <a:xfrm>
-            <a:off x="548640" y="3749039"/>
-            <a:ext cx="6199668" cy="2651760"/>
-          </a:xfrm>
-          <a:prstGeom prst="rect">
-            <a:avLst/>
-          </a:prstGeom>
-        </p:spPr>
-      </p:pic>
-      <p:sp>
-        <p:nvSpPr>
-          <p:cNvPr id="6" name="TextBox 5"/>
-          <p:cNvSpPr txBox="1"/>
-          <p:nvPr/>
-        </p:nvSpPr>
-        <p:spPr>
-          <a:xfrm>
-            <a:off x="6858000" y="3749039"/>
-            <a:ext cx="4846320" cy="2651760"/>
+            <a:off x="365760" y="2514600"/>
+            <a:ext cx="2286000" cy="274320"/>
           </a:xfrm>
           <a:prstGeom prst="rect">
             <a:avLst/>
@@ -5221,80 +5314,1320 @@
           <a:noFill/>
         </p:spPr>
         <p:txBody>
+          <a:bodyPr wrap="none">
+            <a:spAutoFit/>
+          </a:bodyPr>
+          <a:lstStyle/>
+          <a:p>
+            <a:r>
+              <a:rPr sz="1300" b="1">
+                <a:solidFill>
+                  <a:srgbClr val="103A5C"/>
+                </a:solidFill>
+              </a:rPr>
+              <a:t>INGEST  (build the index)</a:t>
+            </a:r>
+          </a:p>
+        </p:txBody>
+      </p:sp>
+      <p:sp>
+        <p:nvSpPr>
+          <p:cNvPr id="6" name="TextBox 5"/>
+          <p:cNvSpPr txBox="1"/>
+          <p:nvPr/>
+        </p:nvSpPr>
+        <p:spPr>
+          <a:xfrm>
+            <a:off x="365760" y="4343400"/>
+            <a:ext cx="2286000" cy="274320"/>
+          </a:xfrm>
+          <a:prstGeom prst="rect">
+            <a:avLst/>
+          </a:prstGeom>
+          <a:noFill/>
+        </p:spPr>
+        <p:txBody>
+          <a:bodyPr wrap="none">
+            <a:spAutoFit/>
+          </a:bodyPr>
+          <a:lstStyle/>
+          <a:p>
+            <a:r>
+              <a:rPr sz="1300" b="1">
+                <a:solidFill>
+                  <a:srgbClr val="E86A33"/>
+                </a:solidFill>
+              </a:rPr>
+              <a:t>QUERY  (answer a question)</a:t>
+            </a:r>
+          </a:p>
+        </p:txBody>
+      </p:sp>
+      <p:sp>
+        <p:nvSpPr>
+          <p:cNvPr id="7" name="Rounded Rectangle 6"/>
+          <p:cNvSpPr/>
+          <p:nvPr/>
+        </p:nvSpPr>
+        <p:spPr>
+          <a:xfrm>
+            <a:off x="996695" y="2788920"/>
+            <a:ext cx="1783080" cy="868680"/>
+          </a:xfrm>
+          <a:prstGeom prst="roundRect">
+            <a:avLst/>
+          </a:prstGeom>
+          <a:solidFill>
+            <a:srgbClr val="DCE6F0"/>
+          </a:solidFill>
+          <a:ln w="15875">
+            <a:solidFill>
+              <a:srgbClr val="103A5C"/>
+            </a:solidFill>
+          </a:ln>
+        </p:spPr>
+        <p:style>
+          <a:lnRef idx="1">
+            <a:schemeClr val="accent1"/>
+          </a:lnRef>
+          <a:fillRef idx="3">
+            <a:schemeClr val="accent1"/>
+          </a:fillRef>
+          <a:effectRef idx="2">
+            <a:schemeClr val="accent1"/>
+          </a:effectRef>
+          <a:fontRef idx="minor">
+            <a:schemeClr val="lt1"/>
+          </a:fontRef>
+        </p:style>
+        <p:txBody>
+          <a:bodyPr wrap="square" lIns="45720" tIns="36576" rIns="45720" bIns="36576" rtlCol="0" anchor="ctr"/>
+          <a:lstStyle/>
+          <a:p>
+            <a:pPr algn="ctr"/>
+            <a:r>
+              <a:rPr sz="1200" b="1">
+                <a:solidFill>
+                  <a:srgbClr val="222222"/>
+                </a:solidFill>
+              </a:rPr>
+              <a:t>PDFs</a:t>
+            </a:r>
+          </a:p>
+          <a:p>
+            <a:pPr algn="ctr"/>
+            <a:r>
+              <a:rPr sz="900" i="1">
+                <a:solidFill>
+                  <a:srgbClr val="555555"/>
+                </a:solidFill>
+              </a:rPr>
+              <a:t>uploaded course</a:t>
+            </a:r>
+          </a:p>
+          <a:p>
+            <a:pPr algn="ctr"/>
+            <a:r>
+              <a:rPr sz="900" i="1">
+                <a:solidFill>
+                  <a:srgbClr val="555555"/>
+                </a:solidFill>
+              </a:rPr>
+              <a:t>documents</a:t>
+            </a:r>
+          </a:p>
+        </p:txBody>
+      </p:sp>
+      <p:sp>
+        <p:nvSpPr>
+          <p:cNvPr id="8" name="Rounded Rectangle 7"/>
+          <p:cNvSpPr/>
+          <p:nvPr/>
+        </p:nvSpPr>
+        <p:spPr>
+          <a:xfrm>
+            <a:off x="3099815" y="2788920"/>
+            <a:ext cx="1783080" cy="868680"/>
+          </a:xfrm>
+          <a:prstGeom prst="roundRect">
+            <a:avLst/>
+          </a:prstGeom>
+          <a:solidFill>
+            <a:srgbClr val="DCE6F0"/>
+          </a:solidFill>
+          <a:ln w="15875">
+            <a:solidFill>
+              <a:srgbClr val="103A5C"/>
+            </a:solidFill>
+          </a:ln>
+        </p:spPr>
+        <p:style>
+          <a:lnRef idx="1">
+            <a:schemeClr val="accent1"/>
+          </a:lnRef>
+          <a:fillRef idx="3">
+            <a:schemeClr val="accent1"/>
+          </a:fillRef>
+          <a:effectRef idx="2">
+            <a:schemeClr val="accent1"/>
+          </a:effectRef>
+          <a:fontRef idx="minor">
+            <a:schemeClr val="lt1"/>
+          </a:fontRef>
+        </p:style>
+        <p:txBody>
+          <a:bodyPr wrap="square" lIns="45720" tIns="36576" rIns="45720" bIns="36576" rtlCol="0" anchor="ctr"/>
+          <a:lstStyle/>
+          <a:p>
+            <a:pPr algn="ctr"/>
+            <a:r>
+              <a:rPr sz="1200" b="1">
+                <a:solidFill>
+                  <a:srgbClr val="222222"/>
+                </a:solidFill>
+              </a:rPr>
+              <a:t>Pages</a:t>
+            </a:r>
+          </a:p>
+          <a:p>
+            <a:pPr algn="ctr"/>
+            <a:r>
+              <a:rPr sz="900" i="1">
+                <a:solidFill>
+                  <a:srgbClr val="555555"/>
+                </a:solidFill>
+              </a:rPr>
+              <a:t>pypdf</a:t>
+            </a:r>
+          </a:p>
+          <a:p>
+            <a:pPr algn="ctr"/>
+            <a:r>
+              <a:rPr sz="900" i="1">
+                <a:solidFill>
+                  <a:srgbClr val="555555"/>
+                </a:solidFill>
+              </a:rPr>
+              <a:t>per-page text</a:t>
+            </a:r>
+          </a:p>
+        </p:txBody>
+      </p:sp>
+      <p:sp>
+        <p:nvSpPr>
+          <p:cNvPr id="9" name="Rounded Rectangle 8"/>
+          <p:cNvSpPr/>
+          <p:nvPr/>
+        </p:nvSpPr>
+        <p:spPr>
+          <a:xfrm>
+            <a:off x="5202936" y="2788920"/>
+            <a:ext cx="1783080" cy="868680"/>
+          </a:xfrm>
+          <a:prstGeom prst="roundRect">
+            <a:avLst/>
+          </a:prstGeom>
+          <a:solidFill>
+            <a:srgbClr val="DCE6F0"/>
+          </a:solidFill>
+          <a:ln w="15875">
+            <a:solidFill>
+              <a:srgbClr val="103A5C"/>
+            </a:solidFill>
+          </a:ln>
+        </p:spPr>
+        <p:style>
+          <a:lnRef idx="1">
+            <a:schemeClr val="accent1"/>
+          </a:lnRef>
+          <a:fillRef idx="3">
+            <a:schemeClr val="accent1"/>
+          </a:fillRef>
+          <a:effectRef idx="2">
+            <a:schemeClr val="accent1"/>
+          </a:effectRef>
+          <a:fontRef idx="minor">
+            <a:schemeClr val="lt1"/>
+          </a:fontRef>
+        </p:style>
+        <p:txBody>
+          <a:bodyPr wrap="square" lIns="45720" tIns="36576" rIns="45720" bIns="36576" rtlCol="0" anchor="ctr"/>
+          <a:lstStyle/>
+          <a:p>
+            <a:pPr algn="ctr"/>
+            <a:r>
+              <a:rPr sz="1200" b="1">
+                <a:solidFill>
+                  <a:srgbClr val="222222"/>
+                </a:solidFill>
+              </a:rPr>
+              <a:t>Chunks</a:t>
+            </a:r>
+          </a:p>
+          <a:p>
+            <a:pPr algn="ctr"/>
+            <a:r>
+              <a:rPr sz="900" i="1">
+                <a:solidFill>
+                  <a:srgbClr val="555555"/>
+                </a:solidFill>
+              </a:rPr>
+              <a:t>heading-aware</a:t>
+            </a:r>
+          </a:p>
+          <a:p>
+            <a:pPr algn="ctr"/>
+            <a:r>
+              <a:rPr sz="900" i="1">
+                <a:solidFill>
+                  <a:srgbClr val="555555"/>
+                </a:solidFill>
+              </a:rPr>
+              <a:t>+ recursive split</a:t>
+            </a:r>
+          </a:p>
+          <a:p>
+            <a:pPr algn="ctr"/>
+            <a:r>
+              <a:rPr sz="900" i="1">
+                <a:solidFill>
+                  <a:srgbClr val="555555"/>
+                </a:solidFill>
+              </a:rPr>
+              <a:t>(800 chars, overlap 150)</a:t>
+            </a:r>
+          </a:p>
+        </p:txBody>
+      </p:sp>
+      <p:sp>
+        <p:nvSpPr>
+          <p:cNvPr id="10" name="Rounded Rectangle 9"/>
+          <p:cNvSpPr/>
+          <p:nvPr/>
+        </p:nvSpPr>
+        <p:spPr>
+          <a:xfrm>
+            <a:off x="7306055" y="2788920"/>
+            <a:ext cx="1783080" cy="868680"/>
+          </a:xfrm>
+          <a:prstGeom prst="roundRect">
+            <a:avLst/>
+          </a:prstGeom>
+          <a:solidFill>
+            <a:srgbClr val="DCE6F0"/>
+          </a:solidFill>
+          <a:ln w="15875">
+            <a:solidFill>
+              <a:srgbClr val="103A5C"/>
+            </a:solidFill>
+          </a:ln>
+        </p:spPr>
+        <p:style>
+          <a:lnRef idx="1">
+            <a:schemeClr val="accent1"/>
+          </a:lnRef>
+          <a:fillRef idx="3">
+            <a:schemeClr val="accent1"/>
+          </a:fillRef>
+          <a:effectRef idx="2">
+            <a:schemeClr val="accent1"/>
+          </a:effectRef>
+          <a:fontRef idx="minor">
+            <a:schemeClr val="lt1"/>
+          </a:fontRef>
+        </p:style>
+        <p:txBody>
+          <a:bodyPr wrap="square" lIns="45720" tIns="36576" rIns="45720" bIns="36576" rtlCol="0" anchor="ctr"/>
+          <a:lstStyle/>
+          <a:p>
+            <a:pPr algn="ctr"/>
+            <a:r>
+              <a:rPr sz="1200" b="1">
+                <a:solidFill>
+                  <a:srgbClr val="222222"/>
+                </a:solidFill>
+              </a:rPr>
+              <a:t>Vectors</a:t>
+            </a:r>
+          </a:p>
+          <a:p>
+            <a:pPr algn="ctr"/>
+            <a:r>
+              <a:rPr sz="900" i="1">
+                <a:solidFill>
+                  <a:srgbClr val="555555"/>
+                </a:solidFill>
+              </a:rPr>
+              <a:t>MiniLM-L6-v2</a:t>
+            </a:r>
+          </a:p>
+          <a:p>
+            <a:pPr algn="ctr"/>
+            <a:r>
+              <a:rPr sz="900" i="1">
+                <a:solidFill>
+                  <a:srgbClr val="555555"/>
+                </a:solidFill>
+              </a:rPr>
+              <a:t>384-d embeddings</a:t>
+            </a:r>
+          </a:p>
+          <a:p>
+            <a:pPr algn="ctr"/>
+            <a:r>
+              <a:rPr sz="900" i="1">
+                <a:solidFill>
+                  <a:srgbClr val="555555"/>
+                </a:solidFill>
+              </a:rPr>
+              <a:t>L2-normalized</a:t>
+            </a:r>
+          </a:p>
+        </p:txBody>
+      </p:sp>
+      <p:sp>
+        <p:nvSpPr>
+          <p:cNvPr id="11" name="Rounded Rectangle 10"/>
+          <p:cNvSpPr/>
+          <p:nvPr/>
+        </p:nvSpPr>
+        <p:spPr>
+          <a:xfrm>
+            <a:off x="9409176" y="2788920"/>
+            <a:ext cx="1783080" cy="868680"/>
+          </a:xfrm>
+          <a:prstGeom prst="roundRect">
+            <a:avLst/>
+          </a:prstGeom>
+          <a:solidFill>
+            <a:srgbClr val="FCCCA0"/>
+          </a:solidFill>
+          <a:ln w="15875">
+            <a:solidFill>
+              <a:srgbClr val="103A5C"/>
+            </a:solidFill>
+          </a:ln>
+        </p:spPr>
+        <p:style>
+          <a:lnRef idx="1">
+            <a:schemeClr val="accent1"/>
+          </a:lnRef>
+          <a:fillRef idx="3">
+            <a:schemeClr val="accent1"/>
+          </a:fillRef>
+          <a:effectRef idx="2">
+            <a:schemeClr val="accent1"/>
+          </a:effectRef>
+          <a:fontRef idx="minor">
+            <a:schemeClr val="lt1"/>
+          </a:fontRef>
+        </p:style>
+        <p:txBody>
+          <a:bodyPr wrap="square" lIns="45720" tIns="36576" rIns="45720" bIns="36576" rtlCol="0" anchor="ctr"/>
+          <a:lstStyle/>
+          <a:p>
+            <a:pPr algn="ctr"/>
+            <a:r>
+              <a:rPr sz="1200" b="1">
+                <a:solidFill>
+                  <a:srgbClr val="222222"/>
+                </a:solidFill>
+              </a:rPr>
+              <a:t>FAISS Index</a:t>
+            </a:r>
+          </a:p>
+          <a:p>
+            <a:pPr algn="ctr"/>
+            <a:r>
+              <a:rPr sz="900" i="1">
+                <a:solidFill>
+                  <a:srgbClr val="555555"/>
+                </a:solidFill>
+              </a:rPr>
+              <a:t>IndexFlatIP</a:t>
+            </a:r>
+          </a:p>
+          <a:p>
+            <a:pPr algn="ctr"/>
+            <a:r>
+              <a:rPr sz="900" i="1">
+                <a:solidFill>
+                  <a:srgbClr val="555555"/>
+                </a:solidFill>
+              </a:rPr>
+              <a:t>persisted on disk</a:t>
+            </a:r>
+          </a:p>
+        </p:txBody>
+      </p:sp>
+      <p:cxnSp>
+        <p:nvCxnSpPr>
+          <p:cNvPr id="12" name="Connector 11"/>
+          <p:cNvCxnSpPr/>
+          <p:nvPr/>
+        </p:nvCxnSpPr>
+        <p:spPr>
+          <a:xfrm>
+            <a:off x="2779776" y="3223260"/>
+            <a:ext cx="320039" cy="0"/>
+          </a:xfrm>
+          <a:prstGeom prst="line">
+            <a:avLst/>
+          </a:prstGeom>
+          <a:ln w="19050">
+            <a:solidFill>
+              <a:srgbClr val="4A4A4A"/>
+            </a:solidFill>
+            <a:tailEnd type="triangle" w="med" len="med"/>
+          </a:ln>
+        </p:spPr>
+        <p:style>
+          <a:lnRef idx="2">
+            <a:schemeClr val="accent1"/>
+          </a:lnRef>
+          <a:fillRef idx="0">
+            <a:schemeClr val="accent1"/>
+          </a:fillRef>
+          <a:effectRef idx="1">
+            <a:schemeClr val="accent1"/>
+          </a:effectRef>
+          <a:fontRef idx="minor">
+            <a:schemeClr val="tx1"/>
+          </a:fontRef>
+        </p:style>
+      </p:cxnSp>
+      <p:cxnSp>
+        <p:nvCxnSpPr>
+          <p:cNvPr id="13" name="Connector 12"/>
+          <p:cNvCxnSpPr/>
+          <p:nvPr/>
+        </p:nvCxnSpPr>
+        <p:spPr>
+          <a:xfrm>
+            <a:off x="4882896" y="3223260"/>
+            <a:ext cx="320040" cy="0"/>
+          </a:xfrm>
+          <a:prstGeom prst="line">
+            <a:avLst/>
+          </a:prstGeom>
+          <a:ln w="19050">
+            <a:solidFill>
+              <a:srgbClr val="4A4A4A"/>
+            </a:solidFill>
+            <a:tailEnd type="triangle" w="med" len="med"/>
+          </a:ln>
+        </p:spPr>
+        <p:style>
+          <a:lnRef idx="2">
+            <a:schemeClr val="accent1"/>
+          </a:lnRef>
+          <a:fillRef idx="0">
+            <a:schemeClr val="accent1"/>
+          </a:fillRef>
+          <a:effectRef idx="1">
+            <a:schemeClr val="accent1"/>
+          </a:effectRef>
+          <a:fontRef idx="minor">
+            <a:schemeClr val="tx1"/>
+          </a:fontRef>
+        </p:style>
+      </p:cxnSp>
+      <p:cxnSp>
+        <p:nvCxnSpPr>
+          <p:cNvPr id="14" name="Connector 13"/>
+          <p:cNvCxnSpPr/>
+          <p:nvPr/>
+        </p:nvCxnSpPr>
+        <p:spPr>
+          <a:xfrm>
+            <a:off x="6986016" y="3223260"/>
+            <a:ext cx="320039" cy="0"/>
+          </a:xfrm>
+          <a:prstGeom prst="line">
+            <a:avLst/>
+          </a:prstGeom>
+          <a:ln w="19050">
+            <a:solidFill>
+              <a:srgbClr val="4A4A4A"/>
+            </a:solidFill>
+            <a:tailEnd type="triangle" w="med" len="med"/>
+          </a:ln>
+        </p:spPr>
+        <p:style>
+          <a:lnRef idx="2">
+            <a:schemeClr val="accent1"/>
+          </a:lnRef>
+          <a:fillRef idx="0">
+            <a:schemeClr val="accent1"/>
+          </a:fillRef>
+          <a:effectRef idx="1">
+            <a:schemeClr val="accent1"/>
+          </a:effectRef>
+          <a:fontRef idx="minor">
+            <a:schemeClr val="tx1"/>
+          </a:fontRef>
+        </p:style>
+      </p:cxnSp>
+      <p:cxnSp>
+        <p:nvCxnSpPr>
+          <p:cNvPr id="15" name="Connector 14"/>
+          <p:cNvCxnSpPr/>
+          <p:nvPr/>
+        </p:nvCxnSpPr>
+        <p:spPr>
+          <a:xfrm>
+            <a:off x="9089136" y="3223260"/>
+            <a:ext cx="320040" cy="0"/>
+          </a:xfrm>
+          <a:prstGeom prst="line">
+            <a:avLst/>
+          </a:prstGeom>
+          <a:ln w="19050">
+            <a:solidFill>
+              <a:srgbClr val="4A4A4A"/>
+            </a:solidFill>
+            <a:tailEnd type="triangle" w="med" len="med"/>
+          </a:ln>
+        </p:spPr>
+        <p:style>
+          <a:lnRef idx="2">
+            <a:schemeClr val="accent1"/>
+          </a:lnRef>
+          <a:fillRef idx="0">
+            <a:schemeClr val="accent1"/>
+          </a:fillRef>
+          <a:effectRef idx="1">
+            <a:schemeClr val="accent1"/>
+          </a:effectRef>
+          <a:fontRef idx="minor">
+            <a:schemeClr val="tx1"/>
+          </a:fontRef>
+        </p:style>
+      </p:cxnSp>
+      <p:sp>
+        <p:nvSpPr>
+          <p:cNvPr id="16" name="Rounded Rectangle 15"/>
+          <p:cNvSpPr/>
+          <p:nvPr/>
+        </p:nvSpPr>
+        <p:spPr>
+          <a:xfrm>
+            <a:off x="996695" y="4617720"/>
+            <a:ext cx="1783080" cy="868680"/>
+          </a:xfrm>
+          <a:prstGeom prst="roundRect">
+            <a:avLst/>
+          </a:prstGeom>
+          <a:solidFill>
+            <a:srgbClr val="F7E0CE"/>
+          </a:solidFill>
+          <a:ln w="15875">
+            <a:solidFill>
+              <a:srgbClr val="E86A33"/>
+            </a:solidFill>
+          </a:ln>
+        </p:spPr>
+        <p:style>
+          <a:lnRef idx="1">
+            <a:schemeClr val="accent1"/>
+          </a:lnRef>
+          <a:fillRef idx="3">
+            <a:schemeClr val="accent1"/>
+          </a:fillRef>
+          <a:effectRef idx="2">
+            <a:schemeClr val="accent1"/>
+          </a:effectRef>
+          <a:fontRef idx="minor">
+            <a:schemeClr val="lt1"/>
+          </a:fontRef>
+        </p:style>
+        <p:txBody>
+          <a:bodyPr wrap="square" lIns="45720" tIns="36576" rIns="45720" bIns="36576" rtlCol="0" anchor="ctr"/>
+          <a:lstStyle/>
+          <a:p>
+            <a:pPr algn="ctr"/>
+            <a:r>
+              <a:rPr sz="1200" b="1">
+                <a:solidFill>
+                  <a:srgbClr val="222222"/>
+                </a:solidFill>
+              </a:rPr>
+              <a:t>User question</a:t>
+            </a:r>
+          </a:p>
+          <a:p>
+            <a:pPr algn="ctr"/>
+            <a:r>
+              <a:rPr sz="900" i="1">
+                <a:solidFill>
+                  <a:srgbClr val="555555"/>
+                </a:solidFill>
+              </a:rPr>
+              <a:t>free-form</a:t>
+            </a:r>
+          </a:p>
+          <a:p>
+            <a:pPr algn="ctr"/>
+            <a:r>
+              <a:rPr sz="900" i="1">
+                <a:solidFill>
+                  <a:srgbClr val="555555"/>
+                </a:solidFill>
+              </a:rPr>
+              <a:t>text input</a:t>
+            </a:r>
+          </a:p>
+        </p:txBody>
+      </p:sp>
+      <p:sp>
+        <p:nvSpPr>
+          <p:cNvPr id="17" name="Rounded Rectangle 16"/>
+          <p:cNvSpPr/>
+          <p:nvPr/>
+        </p:nvSpPr>
+        <p:spPr>
+          <a:xfrm>
+            <a:off x="3099815" y="4617720"/>
+            <a:ext cx="1783080" cy="868680"/>
+          </a:xfrm>
+          <a:prstGeom prst="roundRect">
+            <a:avLst/>
+          </a:prstGeom>
+          <a:solidFill>
+            <a:srgbClr val="F7E0CE"/>
+          </a:solidFill>
+          <a:ln w="15875">
+            <a:solidFill>
+              <a:srgbClr val="E86A33"/>
+            </a:solidFill>
+          </a:ln>
+        </p:spPr>
+        <p:style>
+          <a:lnRef idx="1">
+            <a:schemeClr val="accent1"/>
+          </a:lnRef>
+          <a:fillRef idx="3">
+            <a:schemeClr val="accent1"/>
+          </a:fillRef>
+          <a:effectRef idx="2">
+            <a:schemeClr val="accent1"/>
+          </a:effectRef>
+          <a:fontRef idx="minor">
+            <a:schemeClr val="lt1"/>
+          </a:fontRef>
+        </p:style>
+        <p:txBody>
+          <a:bodyPr wrap="square" lIns="45720" tIns="36576" rIns="45720" bIns="36576" rtlCol="0" anchor="ctr"/>
+          <a:lstStyle/>
+          <a:p>
+            <a:pPr algn="ctr"/>
+            <a:r>
+              <a:rPr sz="1200" b="1">
+                <a:solidFill>
+                  <a:srgbClr val="222222"/>
+                </a:solidFill>
+              </a:rPr>
+              <a:t>Top-k retrieval</a:t>
+            </a:r>
+          </a:p>
+          <a:p>
+            <a:pPr algn="ctr"/>
+            <a:r>
+              <a:rPr sz="900" i="1">
+                <a:solidFill>
+                  <a:srgbClr val="555555"/>
+                </a:solidFill>
+              </a:rPr>
+              <a:t>Dense / BM25 /</a:t>
+            </a:r>
+          </a:p>
+          <a:p>
+            <a:pPr algn="ctr"/>
+            <a:r>
+              <a:rPr sz="900" i="1">
+                <a:solidFill>
+                  <a:srgbClr val="555555"/>
+                </a:solidFill>
+              </a:rPr>
+              <a:t>hybrid (α = 0.65)</a:t>
+            </a:r>
+          </a:p>
+          <a:p>
+            <a:pPr algn="ctr"/>
+            <a:r>
+              <a:rPr sz="900" i="1">
+                <a:solidFill>
+                  <a:srgbClr val="555555"/>
+                </a:solidFill>
+              </a:rPr>
+              <a:t>top-k = 4</a:t>
+            </a:r>
+          </a:p>
+        </p:txBody>
+      </p:sp>
+      <p:sp>
+        <p:nvSpPr>
+          <p:cNvPr id="18" name="Rounded Rectangle 17"/>
+          <p:cNvSpPr/>
+          <p:nvPr/>
+        </p:nvSpPr>
+        <p:spPr>
+          <a:xfrm>
+            <a:off x="5202936" y="4617720"/>
+            <a:ext cx="1783080" cy="868680"/>
+          </a:xfrm>
+          <a:prstGeom prst="roundRect">
+            <a:avLst/>
+          </a:prstGeom>
+          <a:solidFill>
+            <a:srgbClr val="F7E0CE"/>
+          </a:solidFill>
+          <a:ln w="15875">
+            <a:solidFill>
+              <a:srgbClr val="E86A33"/>
+            </a:solidFill>
+          </a:ln>
+        </p:spPr>
+        <p:style>
+          <a:lnRef idx="1">
+            <a:schemeClr val="accent1"/>
+          </a:lnRef>
+          <a:fillRef idx="3">
+            <a:schemeClr val="accent1"/>
+          </a:fillRef>
+          <a:effectRef idx="2">
+            <a:schemeClr val="accent1"/>
+          </a:effectRef>
+          <a:fontRef idx="minor">
+            <a:schemeClr val="lt1"/>
+          </a:fontRef>
+        </p:style>
+        <p:txBody>
+          <a:bodyPr wrap="square" lIns="45720" tIns="36576" rIns="45720" bIns="36576" rtlCol="0" anchor="ctr"/>
+          <a:lstStyle/>
+          <a:p>
+            <a:pPr algn="ctr"/>
+            <a:r>
+              <a:rPr sz="1200" b="1">
+                <a:solidFill>
+                  <a:srgbClr val="222222"/>
+                </a:solidFill>
+              </a:rPr>
+              <a:t>Confidence
+guardrail</a:t>
+            </a:r>
+          </a:p>
+          <a:p>
+            <a:pPr algn="ctr"/>
+            <a:r>
+              <a:rPr sz="900" i="1">
+                <a:solidFill>
+                  <a:srgbClr val="555555"/>
+                </a:solidFill>
+              </a:rPr>
+              <a:t>if top score</a:t>
+            </a:r>
+          </a:p>
+          <a:p>
+            <a:pPr algn="ctr"/>
+            <a:r>
+              <a:rPr sz="900" i="1">
+                <a:solidFill>
+                  <a:srgbClr val="555555"/>
+                </a:solidFill>
+              </a:rPr>
+              <a:t>&lt; min_score (0.25)</a:t>
+            </a:r>
+          </a:p>
+          <a:p>
+            <a:pPr algn="ctr"/>
+            <a:r>
+              <a:rPr sz="900" i="1">
+                <a:solidFill>
+                  <a:srgbClr val="555555"/>
+                </a:solidFill>
+              </a:rPr>
+              <a:t>→ refuse</a:t>
+            </a:r>
+          </a:p>
+        </p:txBody>
+      </p:sp>
+      <p:sp>
+        <p:nvSpPr>
+          <p:cNvPr id="19" name="Rounded Rectangle 18"/>
+          <p:cNvSpPr/>
+          <p:nvPr/>
+        </p:nvSpPr>
+        <p:spPr>
+          <a:xfrm>
+            <a:off x="7306055" y="4617720"/>
+            <a:ext cx="1783080" cy="868680"/>
+          </a:xfrm>
+          <a:prstGeom prst="roundRect">
+            <a:avLst/>
+          </a:prstGeom>
+          <a:solidFill>
+            <a:srgbClr val="F7E0CE"/>
+          </a:solidFill>
+          <a:ln w="15875">
+            <a:solidFill>
+              <a:srgbClr val="E86A33"/>
+            </a:solidFill>
+          </a:ln>
+        </p:spPr>
+        <p:style>
+          <a:lnRef idx="1">
+            <a:schemeClr val="accent1"/>
+          </a:lnRef>
+          <a:fillRef idx="3">
+            <a:schemeClr val="accent1"/>
+          </a:fillRef>
+          <a:effectRef idx="2">
+            <a:schemeClr val="accent1"/>
+          </a:effectRef>
+          <a:fontRef idx="minor">
+            <a:schemeClr val="lt1"/>
+          </a:fontRef>
+        </p:style>
+        <p:txBody>
+          <a:bodyPr wrap="square" lIns="45720" tIns="36576" rIns="45720" bIns="36576" rtlCol="0" anchor="ctr"/>
+          <a:lstStyle/>
+          <a:p>
+            <a:pPr algn="ctr"/>
+            <a:r>
+              <a:rPr sz="1200" b="1">
+                <a:solidFill>
+                  <a:srgbClr val="222222"/>
+                </a:solidFill>
+              </a:rPr>
+              <a:t>LLM</a:t>
+            </a:r>
+          </a:p>
+          <a:p>
+            <a:pPr algn="ctr"/>
+            <a:r>
+              <a:rPr sz="900" i="1">
+                <a:solidFill>
+                  <a:srgbClr val="555555"/>
+                </a:solidFill>
+              </a:rPr>
+              <a:t>Gemini-1.5-flash</a:t>
+            </a:r>
+          </a:p>
+          <a:p>
+            <a:pPr algn="ctr"/>
+            <a:r>
+              <a:rPr sz="900" i="1">
+                <a:solidFill>
+                  <a:srgbClr val="555555"/>
+                </a:solidFill>
+              </a:rPr>
+              <a:t>or GPT-4o-mini</a:t>
+            </a:r>
+          </a:p>
+          <a:p>
+            <a:pPr algn="ctr"/>
+            <a:r>
+              <a:rPr sz="900" i="1">
+                <a:solidFill>
+                  <a:srgbClr val="555555"/>
+                </a:solidFill>
+              </a:rPr>
+              <a:t>(strict prompt)</a:t>
+            </a:r>
+          </a:p>
+        </p:txBody>
+      </p:sp>
+      <p:sp>
+        <p:nvSpPr>
+          <p:cNvPr id="20" name="Rounded Rectangle 19"/>
+          <p:cNvSpPr/>
+          <p:nvPr/>
+        </p:nvSpPr>
+        <p:spPr>
+          <a:xfrm>
+            <a:off x="9409176" y="4617720"/>
+            <a:ext cx="1783080" cy="868680"/>
+          </a:xfrm>
+          <a:prstGeom prst="roundRect">
+            <a:avLst/>
+          </a:prstGeom>
+          <a:solidFill>
+            <a:srgbClr val="F7E0CE"/>
+          </a:solidFill>
+          <a:ln w="15875">
+            <a:solidFill>
+              <a:srgbClr val="E86A33"/>
+            </a:solidFill>
+          </a:ln>
+        </p:spPr>
+        <p:style>
+          <a:lnRef idx="1">
+            <a:schemeClr val="accent1"/>
+          </a:lnRef>
+          <a:fillRef idx="3">
+            <a:schemeClr val="accent1"/>
+          </a:fillRef>
+          <a:effectRef idx="2">
+            <a:schemeClr val="accent1"/>
+          </a:effectRef>
+          <a:fontRef idx="minor">
+            <a:schemeClr val="lt1"/>
+          </a:fontRef>
+        </p:style>
+        <p:txBody>
+          <a:bodyPr wrap="square" lIns="45720" tIns="36576" rIns="45720" bIns="36576" rtlCol="0" anchor="ctr"/>
+          <a:lstStyle/>
+          <a:p>
+            <a:pPr algn="ctr"/>
+            <a:r>
+              <a:rPr sz="1200" b="1">
+                <a:solidFill>
+                  <a:srgbClr val="222222"/>
+                </a:solidFill>
+              </a:rPr>
+              <a:t>Answer +
+citations</a:t>
+            </a:r>
+          </a:p>
+          <a:p>
+            <a:pPr algn="ctr"/>
+            <a:r>
+              <a:rPr sz="900" i="1">
+                <a:solidFill>
+                  <a:srgbClr val="555555"/>
+                </a:solidFill>
+              </a:rPr>
+              <a:t>[file p.PAGE]</a:t>
+            </a:r>
+          </a:p>
+          <a:p>
+            <a:pPr algn="ctr"/>
+            <a:r>
+              <a:rPr sz="900" i="1">
+                <a:solidFill>
+                  <a:srgbClr val="555555"/>
+                </a:solidFill>
+              </a:rPr>
+              <a:t>grounded or refused</a:t>
+            </a:r>
+          </a:p>
+        </p:txBody>
+      </p:sp>
+      <p:cxnSp>
+        <p:nvCxnSpPr>
+          <p:cNvPr id="21" name="Connector 20"/>
+          <p:cNvCxnSpPr/>
+          <p:nvPr/>
+        </p:nvCxnSpPr>
+        <p:spPr>
+          <a:xfrm>
+            <a:off x="2779776" y="5052059"/>
+            <a:ext cx="320039" cy="0"/>
+          </a:xfrm>
+          <a:prstGeom prst="line">
+            <a:avLst/>
+          </a:prstGeom>
+          <a:ln w="19050">
+            <a:solidFill>
+              <a:srgbClr val="4A4A4A"/>
+            </a:solidFill>
+            <a:tailEnd type="triangle" w="med" len="med"/>
+          </a:ln>
+        </p:spPr>
+        <p:style>
+          <a:lnRef idx="2">
+            <a:schemeClr val="accent1"/>
+          </a:lnRef>
+          <a:fillRef idx="0">
+            <a:schemeClr val="accent1"/>
+          </a:fillRef>
+          <a:effectRef idx="1">
+            <a:schemeClr val="accent1"/>
+          </a:effectRef>
+          <a:fontRef idx="minor">
+            <a:schemeClr val="tx1"/>
+          </a:fontRef>
+        </p:style>
+      </p:cxnSp>
+      <p:cxnSp>
+        <p:nvCxnSpPr>
+          <p:cNvPr id="22" name="Connector 21"/>
+          <p:cNvCxnSpPr/>
+          <p:nvPr/>
+        </p:nvCxnSpPr>
+        <p:spPr>
+          <a:xfrm>
+            <a:off x="4882896" y="5052059"/>
+            <a:ext cx="320040" cy="0"/>
+          </a:xfrm>
+          <a:prstGeom prst="line">
+            <a:avLst/>
+          </a:prstGeom>
+          <a:ln w="19050">
+            <a:solidFill>
+              <a:srgbClr val="4A4A4A"/>
+            </a:solidFill>
+            <a:tailEnd type="triangle" w="med" len="med"/>
+          </a:ln>
+        </p:spPr>
+        <p:style>
+          <a:lnRef idx="2">
+            <a:schemeClr val="accent1"/>
+          </a:lnRef>
+          <a:fillRef idx="0">
+            <a:schemeClr val="accent1"/>
+          </a:fillRef>
+          <a:effectRef idx="1">
+            <a:schemeClr val="accent1"/>
+          </a:effectRef>
+          <a:fontRef idx="minor">
+            <a:schemeClr val="tx1"/>
+          </a:fontRef>
+        </p:style>
+      </p:cxnSp>
+      <p:cxnSp>
+        <p:nvCxnSpPr>
+          <p:cNvPr id="23" name="Connector 22"/>
+          <p:cNvCxnSpPr/>
+          <p:nvPr/>
+        </p:nvCxnSpPr>
+        <p:spPr>
+          <a:xfrm>
+            <a:off x="6986016" y="5052059"/>
+            <a:ext cx="320039" cy="0"/>
+          </a:xfrm>
+          <a:prstGeom prst="line">
+            <a:avLst/>
+          </a:prstGeom>
+          <a:ln w="19050">
+            <a:solidFill>
+              <a:srgbClr val="4A4A4A"/>
+            </a:solidFill>
+            <a:tailEnd type="triangle" w="med" len="med"/>
+          </a:ln>
+        </p:spPr>
+        <p:style>
+          <a:lnRef idx="2">
+            <a:schemeClr val="accent1"/>
+          </a:lnRef>
+          <a:fillRef idx="0">
+            <a:schemeClr val="accent1"/>
+          </a:fillRef>
+          <a:effectRef idx="1">
+            <a:schemeClr val="accent1"/>
+          </a:effectRef>
+          <a:fontRef idx="minor">
+            <a:schemeClr val="tx1"/>
+          </a:fontRef>
+        </p:style>
+      </p:cxnSp>
+      <p:cxnSp>
+        <p:nvCxnSpPr>
+          <p:cNvPr id="24" name="Connector 23"/>
+          <p:cNvCxnSpPr/>
+          <p:nvPr/>
+        </p:nvCxnSpPr>
+        <p:spPr>
+          <a:xfrm>
+            <a:off x="9089136" y="5052059"/>
+            <a:ext cx="320040" cy="0"/>
+          </a:xfrm>
+          <a:prstGeom prst="line">
+            <a:avLst/>
+          </a:prstGeom>
+          <a:ln w="19050">
+            <a:solidFill>
+              <a:srgbClr val="4A4A4A"/>
+            </a:solidFill>
+            <a:tailEnd type="triangle" w="med" len="med"/>
+          </a:ln>
+        </p:spPr>
+        <p:style>
+          <a:lnRef idx="2">
+            <a:schemeClr val="accent1"/>
+          </a:lnRef>
+          <a:fillRef idx="0">
+            <a:schemeClr val="accent1"/>
+          </a:fillRef>
+          <a:effectRef idx="1">
+            <a:schemeClr val="accent1"/>
+          </a:effectRef>
+          <a:fontRef idx="minor">
+            <a:schemeClr val="tx1"/>
+          </a:fontRef>
+        </p:style>
+      </p:cxnSp>
+      <p:cxnSp>
+        <p:nvCxnSpPr>
+          <p:cNvPr id="25" name="Connector 24"/>
+          <p:cNvCxnSpPr/>
+          <p:nvPr/>
+        </p:nvCxnSpPr>
+        <p:spPr>
+          <a:xfrm>
+            <a:off x="10300715" y="3657600"/>
+            <a:ext cx="0" cy="480060"/>
+          </a:xfrm>
+          <a:prstGeom prst="line">
+            <a:avLst/>
+          </a:prstGeom>
+          <a:ln w="22225">
+            <a:solidFill>
+              <a:srgbClr val="4A4A4A"/>
+            </a:solidFill>
+          </a:ln>
+        </p:spPr>
+        <p:style>
+          <a:lnRef idx="2">
+            <a:schemeClr val="accent1"/>
+          </a:lnRef>
+          <a:fillRef idx="0">
+            <a:schemeClr val="accent1"/>
+          </a:fillRef>
+          <a:effectRef idx="1">
+            <a:schemeClr val="accent1"/>
+          </a:effectRef>
+          <a:fontRef idx="minor">
+            <a:schemeClr val="tx1"/>
+          </a:fontRef>
+        </p:style>
+      </p:cxnSp>
+      <p:cxnSp>
+        <p:nvCxnSpPr>
+          <p:cNvPr id="26" name="Connector 25"/>
+          <p:cNvCxnSpPr/>
+          <p:nvPr/>
+        </p:nvCxnSpPr>
+        <p:spPr>
+          <a:xfrm flipH="1">
+            <a:off x="3991355" y="4137660"/>
+            <a:ext cx="6309360" cy="0"/>
+          </a:xfrm>
+          <a:prstGeom prst="line">
+            <a:avLst/>
+          </a:prstGeom>
+          <a:ln w="22225">
+            <a:solidFill>
+              <a:srgbClr val="4A4A4A"/>
+            </a:solidFill>
+          </a:ln>
+        </p:spPr>
+        <p:style>
+          <a:lnRef idx="2">
+            <a:schemeClr val="accent1"/>
+          </a:lnRef>
+          <a:fillRef idx="0">
+            <a:schemeClr val="accent1"/>
+          </a:fillRef>
+          <a:effectRef idx="1">
+            <a:schemeClr val="accent1"/>
+          </a:effectRef>
+          <a:fontRef idx="minor">
+            <a:schemeClr val="tx1"/>
+          </a:fontRef>
+        </p:style>
+      </p:cxnSp>
+      <p:cxnSp>
+        <p:nvCxnSpPr>
+          <p:cNvPr id="27" name="Connector 26"/>
+          <p:cNvCxnSpPr/>
+          <p:nvPr/>
+        </p:nvCxnSpPr>
+        <p:spPr>
+          <a:xfrm>
+            <a:off x="3991355" y="4137660"/>
+            <a:ext cx="0" cy="480060"/>
+          </a:xfrm>
+          <a:prstGeom prst="line">
+            <a:avLst/>
+          </a:prstGeom>
+          <a:ln w="22225">
+            <a:solidFill>
+              <a:srgbClr val="4A4A4A"/>
+            </a:solidFill>
+            <a:tailEnd type="triangle" w="med" len="med"/>
+          </a:ln>
+        </p:spPr>
+        <p:style>
+          <a:lnRef idx="2">
+            <a:schemeClr val="accent1"/>
+          </a:lnRef>
+          <a:fillRef idx="0">
+            <a:schemeClr val="accent1"/>
+          </a:fillRef>
+          <a:effectRef idx="1">
+            <a:schemeClr val="accent1"/>
+          </a:effectRef>
+          <a:fontRef idx="minor">
+            <a:schemeClr val="tx1"/>
+          </a:fontRef>
+        </p:style>
+      </p:cxnSp>
+      <p:sp>
+        <p:nvSpPr>
+          <p:cNvPr id="28" name="TextBox 27"/>
+          <p:cNvSpPr txBox="1"/>
+          <p:nvPr/>
+        </p:nvSpPr>
+        <p:spPr>
+          <a:xfrm>
+            <a:off x="4082795" y="3845052"/>
+            <a:ext cx="6126479" cy="228600"/>
+          </a:xfrm>
+          <a:prstGeom prst="rect">
+            <a:avLst/>
+          </a:prstGeom>
+          <a:noFill/>
+        </p:spPr>
+        <p:txBody>
+          <a:bodyPr wrap="none">
+            <a:spAutoFit/>
+          </a:bodyPr>
+          <a:lstStyle/>
+          <a:p>
+            <a:pPr algn="ctr"/>
+            <a:r>
+              <a:rPr sz="1000" i="1">
+                <a:solidFill>
+                  <a:srgbClr val="4A4A4A"/>
+                </a:solidFill>
+              </a:rPr>
+              <a:t>retrieve  (same vector space ⇒ same embedding model)</a:t>
+            </a:r>
+          </a:p>
+        </p:txBody>
+      </p:sp>
+      <p:sp>
+        <p:nvSpPr>
+          <p:cNvPr id="29" name="TextBox 28"/>
+          <p:cNvSpPr txBox="1"/>
+          <p:nvPr/>
+        </p:nvSpPr>
+        <p:spPr>
+          <a:xfrm>
+            <a:off x="365760" y="5669280"/>
+            <a:ext cx="11430000" cy="274320"/>
+          </a:xfrm>
+          <a:prstGeom prst="rect">
+            <a:avLst/>
+          </a:prstGeom>
+          <a:noFill/>
+        </p:spPr>
+        <p:txBody>
           <a:bodyPr wrap="square">
             <a:spAutoFit/>
           </a:bodyPr>
           <a:lstStyle/>
           <a:p>
-            <a:pPr>
-              <a:defRPr sz="1400" b="1">
-                <a:solidFill>
-                  <a:srgbClr val="222222"/>
-                </a:solidFill>
-              </a:defRPr>
-            </a:pPr>
-            <a:r>
-              <a:t>Stack at a glance:</a:t>
-            </a:r>
-          </a:p>
-          <a:p>
-            <a:pPr>
-              <a:defRPr sz="1400">
-                <a:solidFill>
-                  <a:srgbClr val="222222"/>
-                </a:solidFill>
-              </a:defRPr>
-            </a:pPr>
-            <a:r>
-              <a:t>• Embeddings: sentence-transformers (swappable: MiniLM / BGE / MPNet / Arctic).</a:t>
-            </a:r>
-          </a:p>
-          <a:p>
-            <a:pPr>
-              <a:defRPr sz="1400">
-                <a:solidFill>
-                  <a:srgbClr val="222222"/>
-                </a:solidFill>
-              </a:defRPr>
-            </a:pPr>
-            <a:r>
-              <a:t>• Index: FAISS IndexFlatIP — exact search at this scale.</a:t>
-            </a:r>
-          </a:p>
-          <a:p>
-            <a:pPr>
-              <a:defRPr sz="1400">
-                <a:solidFill>
-                  <a:srgbClr val="222222"/>
-                </a:solidFill>
-              </a:defRPr>
-            </a:pPr>
-            <a:r>
-              <a:t>• Retrieval: Dense FAISS, sparse BM25, or hybrid score fusion.</a:t>
-            </a:r>
-          </a:p>
-          <a:p>
-            <a:pPr>
-              <a:defRPr sz="1400">
-                <a:solidFill>
-                  <a:srgbClr val="222222"/>
-                </a:solidFill>
-              </a:defRPr>
-            </a:pPr>
-            <a:r>
-              <a:t>• LLM: Gemini-1.5-flash (default) or GPT-4o-mini, swappable at runtime.</a:t>
-            </a:r>
-          </a:p>
-          <a:p>
-            <a:pPr>
-              <a:defRPr sz="1400">
-                <a:solidFill>
-                  <a:srgbClr val="222222"/>
-                </a:solidFill>
-              </a:defRPr>
-            </a:pPr>
-            <a:r>
-              <a:t>• Guardrail: top score &lt; min_score → refuse instead of calling the LLM.</a:t>
+            <a:pPr algn="ctr"/>
+            <a:r>
+              <a:rPr sz="1100" i="1">
+                <a:solidFill>
+                  <a:srgbClr val="666666"/>
+                </a:solidFill>
+              </a:rPr>
+              <a:t>QUERY reads from the FAISS index built by INGEST. The confidence guardrail short-circuits the LLM call when retrieval is weak — this is the primary anti-hallucination defense.</a:t>
             </a:r>
           </a:p>
         </p:txBody>
@@ -5308,7 +6641,7 @@
 </file>
 
 <file path=ppt/slides/slide6.xml><?xml version="1.0" encoding="utf-8"?>
-<p:sld xmlns:a="http://schemas.openxmlformats.org/drawingml/2006/main" xmlns:p="http://schemas.openxmlformats.org/presentationml/2006/main" xmlns:r="http://schemas.openxmlformats.org/officeDocument/2006/relationships">
+<p:sld xmlns:a="http://schemas.openxmlformats.org/drawingml/2006/main" xmlns:r="http://schemas.openxmlformats.org/officeDocument/2006/relationships" xmlns:p="http://schemas.openxmlformats.org/presentationml/2006/main">
   <p:cSld>
     <p:spTree>
       <p:nvGrpSpPr>
@@ -5316,7 +6649,14 @@
         <p:cNvGrpSpPr/>
         <p:nvPr/>
       </p:nvGrpSpPr>
-      <p:grpSpPr/>
+      <p:grpSpPr>
+        <a:xfrm>
+          <a:off x="0" y="0"/>
+          <a:ext cx="0" cy="0"/>
+          <a:chOff x="0" y="0"/>
+          <a:chExt cx="0" cy="0"/>
+        </a:xfrm>
+      </p:grpSpPr>
       <p:sp>
         <p:nvSpPr>
           <p:cNvPr id="2" name="Rectangle 1"/>
@@ -5357,6 +6697,7 @@
           <a:lstStyle/>
           <a:p>
             <a:pPr algn="ctr"/>
+            <a:endParaRPr/>
           </a:p>
         </p:txBody>
       </p:sp>
@@ -5421,14 +6762,14 @@
               <a:spcAft>
                 <a:spcPts val="800"/>
               </a:spcAft>
-              <a:defRPr sz="1600">
+              <a:defRPr sz="1500">
                 <a:solidFill>
                   <a:srgbClr val="222222"/>
                 </a:solidFill>
               </a:defRPr>
             </a:pPr>
             <a:r>
-              <a:t>Embedding model: all-MiniLM-L6-v2 default (small, fast, free, ~90 MB). Sidebar dropdown lets us swap to BGE-small, MPNet, or Arctic-xs and rebuild.</a:t>
+              <a:t>Embedding model: all-MiniLM-L6-v2 default (small, fast, ~90 MB). Sidebar dropdown lets us swap to BGE-small, MPNet, or Arctic-xs and rebuild.</a:t>
             </a:r>
           </a:p>
           <a:p>
@@ -5436,14 +6777,14 @@
               <a:spcAft>
                 <a:spcPts val="800"/>
               </a:spcAft>
-              <a:defRPr sz="1600">
+              <a:defRPr sz="1500">
                 <a:solidFill>
                   <a:srgbClr val="222222"/>
                 </a:solidFill>
               </a:defRPr>
             </a:pPr>
             <a:r>
-              <a:t>Hybrid retrieval: final_score = α · dense_score + (1 − α) · BM25, default α=0.65. Helps exact course terms (e.g. "Week 3") and paraphrases reinforce each other.</a:t>
+              <a:t>Hybrid retrieval: final_score = α · dense + (1 − α) · BM25, default α = 0.65. Lets exact course terms ("Week 3") and paraphrases reinforce each other.</a:t>
             </a:r>
           </a:p>
           <a:p>
@@ -5451,14 +6792,14 @@
               <a:spcAft>
                 <a:spcPts val="800"/>
               </a:spcAft>
-              <a:defRPr sz="1600">
+              <a:defRPr sz="1500">
                 <a:solidFill>
                   <a:srgbClr val="222222"/>
                 </a:solidFill>
               </a:defRPr>
             </a:pPr>
             <a:r>
-              <a:t>Strict grounded prompt: "answer ONLY from this context, refuse otherwise, cite [filename p.PAGE]". The exact refusal sentence is detected to flip the grounded_or_not flag.</a:t>
+              <a:t>Strict grounded prompt: "answer ONLY from this context, refuse otherwise, cite [filename p.PAGE]". The exact refusal sentence flips the grounded_or_not flag automatically.</a:t>
             </a:r>
           </a:p>
           <a:p>
@@ -5466,14 +6807,14 @@
               <a:spcAft>
                 <a:spcPts val="800"/>
               </a:spcAft>
-              <a:defRPr sz="1600">
+              <a:defRPr sz="1500">
                 <a:solidFill>
                   <a:srgbClr val="222222"/>
                 </a:solidFill>
               </a:defRPr>
             </a:pPr>
             <a:r>
-              <a:t>LoRA experiment: PEFT adapter on the q/v attention modules of FLAN-T5-small (rank 8, α 16, dropout 0.05). Only ~1.4 MB of weights are trained — base model stays frozen.</a:t>
+              <a:t>LoRA fine-tune of FLAN-T5-small: base model stays frozen; we train only a 1.3 MB rank-8 patch on the q/v attention layers — 99 auto-generated Q&amp;A pairs, 3 epochs, runs on Mac CPU.</a:t>
             </a:r>
           </a:p>
           <a:p>
@@ -5481,14 +6822,14 @@
               <a:spcAft>
                 <a:spcPts val="800"/>
               </a:spcAft>
-              <a:defRPr sz="1600">
+              <a:defRPr sz="1500">
                 <a:solidFill>
                   <a:srgbClr val="222222"/>
                 </a:solidFill>
               </a:defRPr>
             </a:pPr>
             <a:r>
-              <a:t>QLoRA path: included as a readiness check (CUDA + bitsandbytes). On Mac/CPU it correctly reports unavailable; LoRA is the practical local path.</a:t>
+              <a:t>QLoRA: optional GPU-only path exposed as a readiness check. On Mac it correctly reports "not ready" (no CUDA / bitsandbytes), which is why LoRA is the path we actually run end-to-end.</a:t>
             </a:r>
           </a:p>
           <a:p>
@@ -5496,14 +6837,14 @@
               <a:spcAft>
                 <a:spcPts val="800"/>
               </a:spcAft>
-              <a:defRPr sz="1600">
+              <a:defRPr sz="1500">
                 <a:solidFill>
                   <a:srgbClr val="222222"/>
                 </a:solidFill>
               </a:defRPr>
             </a:pPr>
             <a:r>
-              <a:t>Engineering constraints handled: API rate limits → temperature 0.1 + concise prompts; CPU-only training; reproducible manifests; embedding-mismatch guard auto-resets stale indexes.</a:t>
+              <a:t>Engineering trade-offs: low temperature (0.1) + tight prompts to control cost; CPU-only training and indexing; every index ships with a manifest.json so swapping the embedding model auto-clears the stale index.</a:t>
             </a:r>
           </a:p>
         </p:txBody>
@@ -5517,7 +6858,7 @@
 </file>
 
 <file path=ppt/slides/slide7.xml><?xml version="1.0" encoding="utf-8"?>
-<p:sld xmlns:a="http://schemas.openxmlformats.org/drawingml/2006/main" xmlns:p="http://schemas.openxmlformats.org/presentationml/2006/main" xmlns:r="http://schemas.openxmlformats.org/officeDocument/2006/relationships">
+<p:sld xmlns:a="http://schemas.openxmlformats.org/drawingml/2006/main" xmlns:r="http://schemas.openxmlformats.org/officeDocument/2006/relationships" xmlns:p="http://schemas.openxmlformats.org/presentationml/2006/main">
   <p:cSld>
     <p:spTree>
       <p:nvGrpSpPr>
@@ -5525,7 +6866,14 @@
         <p:cNvGrpSpPr/>
         <p:nvPr/>
       </p:nvGrpSpPr>
-      <p:grpSpPr/>
+      <p:grpSpPr>
+        <a:xfrm>
+          <a:off x="0" y="0"/>
+          <a:ext cx="0" cy="0"/>
+          <a:chOff x="0" y="0"/>
+          <a:chExt cx="0" cy="0"/>
+        </a:xfrm>
+      </p:grpSpPr>
       <p:sp>
         <p:nvSpPr>
           <p:cNvPr id="2" name="Rectangle 1"/>
@@ -5566,6 +6914,7 @@
           <a:lstStyle/>
           <a:p>
             <a:pPr algn="ctr"/>
+            <a:endParaRPr/>
           </a:p>
         </p:txBody>
       </p:sp>
@@ -5682,7 +7031,7 @@
               </a:defRPr>
             </a:pPr>
             <a:r>
-              <a:t>Semantic similarity (pred vs gold): 0.61.   BERTScore F1: 0.77.</a:t>
+              <a:t>Semantic similarity (pred vs gold): 0.61.   BERTScore F1: 0.77 (precision 0.71, recall 0.84).</a:t>
             </a:r>
           </a:p>
           <a:p>
@@ -5712,7 +7061,7 @@
               </a:defRPr>
             </a:pPr>
             <a:r>
-              <a:t>LoRA experiment (94 train / 23 eval, 3 epochs, lr 5e-4):  eval_loss = 0.394,  mean Jaccard = 0.673.</a:t>
+              <a:t>LoRA experiment (99 train / 18 eval, 3 epochs, lr 5e-4):  eval_loss = 0.332,  mean Jaccard = 0.677.</a:t>
             </a:r>
           </a:p>
         </p:txBody>
@@ -5726,7 +7075,7 @@
           <p:nvPr/>
         </p:nvPicPr>
         <p:blipFill>
-          <a:blip r:embed="rId2"/>
+          <a:blip r:embed="rId3"/>
           <a:stretch>
             <a:fillRect/>
           </a:stretch>
@@ -5750,7 +7099,7 @@
           <p:nvPr/>
         </p:nvPicPr>
         <p:blipFill>
-          <a:blip r:embed="rId3"/>
+          <a:blip r:embed="rId4"/>
           <a:stretch>
             <a:fillRect/>
           </a:stretch>
@@ -5809,7 +7158,7 @@
 </file>
 
 <file path=ppt/slides/slide8.xml><?xml version="1.0" encoding="utf-8"?>
-<p:sld xmlns:a="http://schemas.openxmlformats.org/drawingml/2006/main" xmlns:p="http://schemas.openxmlformats.org/presentationml/2006/main" xmlns:r="http://schemas.openxmlformats.org/officeDocument/2006/relationships">
+<p:sld xmlns:a="http://schemas.openxmlformats.org/drawingml/2006/main" xmlns:r="http://schemas.openxmlformats.org/officeDocument/2006/relationships" xmlns:p="http://schemas.openxmlformats.org/presentationml/2006/main">
   <p:cSld>
     <p:spTree>
       <p:nvGrpSpPr>
@@ -5817,7 +7166,14 @@
         <p:cNvGrpSpPr/>
         <p:nvPr/>
       </p:nvGrpSpPr>
-      <p:grpSpPr/>
+      <p:grpSpPr>
+        <a:xfrm>
+          <a:off x="0" y="0"/>
+          <a:ext cx="0" cy="0"/>
+          <a:chOff x="0" y="0"/>
+          <a:chExt cx="0" cy="0"/>
+        </a:xfrm>
+      </p:grpSpPr>
       <p:sp>
         <p:nvSpPr>
           <p:cNvPr id="2" name="Rectangle 1"/>
@@ -5858,6 +7214,7 @@
           <a:lstStyle/>
           <a:p>
             <a:pPr algn="ctr"/>
+            <a:endParaRPr/>
           </a:p>
         </p:txBody>
       </p:sp>
@@ -5988,7 +7345,7 @@
           <p:nvPr/>
         </p:nvPicPr>
         <p:blipFill>
-          <a:blip r:embed="rId2"/>
+          <a:blip r:embed="rId3"/>
           <a:stretch>
             <a:fillRect/>
           </a:stretch>
@@ -6012,7 +7369,7 @@
           <p:nvPr/>
         </p:nvPicPr>
         <p:blipFill>
-          <a:blip r:embed="rId3"/>
+          <a:blip r:embed="rId4"/>
           <a:stretch>
             <a:fillRect/>
           </a:stretch>
@@ -6071,7 +7428,7 @@
 </file>
 
 <file path=ppt/slides/slide9.xml><?xml version="1.0" encoding="utf-8"?>
-<p:sld xmlns:a="http://schemas.openxmlformats.org/drawingml/2006/main" xmlns:p="http://schemas.openxmlformats.org/presentationml/2006/main" xmlns:r="http://schemas.openxmlformats.org/officeDocument/2006/relationships">
+<p:sld xmlns:a="http://schemas.openxmlformats.org/drawingml/2006/main" xmlns:r="http://schemas.openxmlformats.org/officeDocument/2006/relationships" xmlns:p="http://schemas.openxmlformats.org/presentationml/2006/main">
   <p:cSld>
     <p:spTree>
       <p:nvGrpSpPr>
@@ -6079,7 +7436,14 @@
         <p:cNvGrpSpPr/>
         <p:nvPr/>
       </p:nvGrpSpPr>
-      <p:grpSpPr/>
+      <p:grpSpPr>
+        <a:xfrm>
+          <a:off x="0" y="0"/>
+          <a:ext cx="0" cy="0"/>
+          <a:chOff x="0" y="0"/>
+          <a:chExt cx="0" cy="0"/>
+        </a:xfrm>
+      </p:grpSpPr>
       <p:sp>
         <p:nvSpPr>
           <p:cNvPr id="2" name="Rectangle 1"/>
@@ -6120,6 +7484,7 @@
           <a:lstStyle/>
           <a:p>
             <a:pPr algn="ctr"/>
+            <a:endParaRPr/>
           </a:p>
         </p:txBody>
       </p:sp>
@@ -6153,6 +7518,7 @@
               </a:defRPr>
             </a:pPr>
             <a:r>
+              <a:rPr dirty="0"/>
               <a:t>Reflection, Limitations &amp; Future Work</a:t>
             </a:r>
           </a:p>
@@ -6167,7 +7533,7 @@
         <p:spPr>
           <a:xfrm>
             <a:off x="457200" y="1097280"/>
-            <a:ext cx="11247120" cy="5212080"/>
+            <a:ext cx="11247120" cy="3785652"/>
           </a:xfrm>
           <a:prstGeom prst="rect">
             <a:avLst/>
@@ -6180,63 +7546,123 @@
           </a:bodyPr>
           <a:lstStyle/>
           <a:p>
-            <a:pPr>
-              <a:spcAft>
-                <a:spcPts val="800"/>
-              </a:spcAft>
-              <a:defRPr sz="1500">
-                <a:solidFill>
-                  <a:srgbClr val="222222"/>
-                </a:solidFill>
-              </a:defRPr>
+            <a:r>
+              <a:rPr lang="en-US" sz="1500" dirty="0"/>
+              <a:t>KEY TAKEAWAYS</a:t>
+            </a:r>
+          </a:p>
+          <a:p>
+            <a:pPr marL="285750" indent="-285750">
+              <a:buFont typeface="Arial" panose="020B0604020202020204" pitchFamily="34" charset="0"/>
+              <a:buChar char="•"/>
             </a:pPr>
             <a:r>
-              <a:t>Reflection: the strict grounded prompt + min_score guardrail did most of the heavy lifting against hallucination — more than any single model swap. Hybrid BM25 + dense beat dense alone for course-specific terms (course codes, week numbers).</a:t>
-            </a:r>
-          </a:p>
-          <a:p>
-            <a:pPr>
-              <a:spcAft>
-                <a:spcPts val="800"/>
-              </a:spcAft>
-              <a:defRPr sz="1500">
-                <a:solidFill>
-                  <a:srgbClr val="222222"/>
-                </a:solidFill>
-              </a:defRPr>
+              <a:rPr lang="en-US" sz="1500" dirty="0"/>
+              <a:t>Strict prompts worked best. Forcing the LLM to answer only from retrieved context, plus a confidence threshold, caught more hallucinations than any model upgrade.</a:t>
+            </a:r>
+          </a:p>
+          <a:p>
+            <a:pPr marL="285750" indent="-285750">
+              <a:buFont typeface="Arial" panose="020B0604020202020204" pitchFamily="34" charset="0"/>
+              <a:buChar char="•"/>
             </a:pPr>
             <a:r>
-              <a:t>Reflection: RAG &gt; pure fine-tuning when the corpus is dynamic — users can upload new PDFs at any time, so retrieval has to stay live. LoRA is best framed as a research extension, not a replacement.</a:t>
-            </a:r>
-          </a:p>
-          <a:p>
-            <a:pPr>
-              <a:spcAft>
-                <a:spcPts val="800"/>
-              </a:spcAft>
-              <a:defRPr sz="1500">
-                <a:solidFill>
-                  <a:srgbClr val="222222"/>
-                </a:solidFill>
-              </a:defRPr>
+              <a:rPr lang="en-US" sz="1500" dirty="0"/>
+              <a:t>Retrieval quality drove answer quality. Hybrid BM25 + dense search beat dense alone on course-specific terms like "Week 3" or course codes, and semantic search by itself missed those.</a:t>
+            </a:r>
+          </a:p>
+          <a:p>
+            <a:endParaRPr lang="en-US" sz="1500" dirty="0"/>
+          </a:p>
+          <a:p>
+            <a:r>
+              <a:rPr lang="en-US" sz="1500" dirty="0"/>
+              <a:t>LIMITATIONS</a:t>
+            </a:r>
+          </a:p>
+          <a:p>
+            <a:pPr marL="342900" indent="-342900">
+              <a:buFont typeface="Arial" panose="020B0604020202020204" pitchFamily="34" charset="0"/>
+              <a:buChar char="•"/>
             </a:pPr>
             <a:r>
-              <a:t>Limitations: pypdf has no OCR (scanned PDFs fail silently); heading detection is heuristic; template-generated LoRA QA pairs cap what the adapter can really learn; QLoRA cannot run on Mac (no CUDA / bitsandbytes); token-overlap is a coarse adapter metric.</a:t>
-            </a:r>
-          </a:p>
-          <a:p>
-            <a:pPr>
-              <a:spcAft>
-                <a:spcPts val="800"/>
-              </a:spcAft>
-              <a:defRPr sz="1500">
-                <a:solidFill>
-                  <a:srgbClr val="222222"/>
-                </a:solidFill>
-              </a:defRPr>
+              <a:rPr lang="en-US" sz="1500" dirty="0"/>
+              <a:t>Most failures were "partially correct" answers (11 of 25), not hallucinations. The bot found the right page but paraphrased loosely.</a:t>
+            </a:r>
+          </a:p>
+          <a:p>
+            <a:pPr marL="342900" indent="-342900">
+              <a:buFont typeface="Arial" panose="020B0604020202020204" pitchFamily="34" charset="0"/>
+              <a:buChar char="•"/>
             </a:pPr>
             <a:r>
-              <a:t>Future work: OCR fallback (ocrmypdf); cross-encoder re-ranker on retrieved chunks; per-course namespaces with a switcher; QLoRA on Colab (free T4) for true 4-bit comparison; human-written QA pairs evaluated with BERTScore for the LoRA path; LLM-response cache keyed on (question, retrieved_ids) to cut eval cost.</a:t>
+              <a:rPr lang="en-US" sz="1500" dirty="0"/>
+              <a:t>Only 25 questions were used because each one needed manual labeling.</a:t>
+            </a:r>
+          </a:p>
+          <a:p>
+            <a:pPr marL="342900" indent="-342900">
+              <a:buFont typeface="Arial" panose="020B0604020202020204" pitchFamily="34" charset="0"/>
+              <a:buChar char="•"/>
+            </a:pPr>
+            <a:r>
+              <a:rPr lang="en-US" sz="1500" dirty="0"/>
+              <a:t>We couldn't run </a:t>
+            </a:r>
+            <a:r>
+              <a:rPr lang="en-US" sz="1500" dirty="0" err="1"/>
+              <a:t>QLoRA</a:t>
+            </a:r>
+            <a:r>
+              <a:rPr lang="en-US" sz="1500" dirty="0"/>
+              <a:t> because it needs an NVIDIA GPU, and we only had Mac CPUs.</a:t>
+            </a:r>
+          </a:p>
+          <a:p>
+            <a:endParaRPr lang="en-US" sz="1500" dirty="0"/>
+          </a:p>
+          <a:p>
+            <a:r>
+              <a:rPr lang="en-US" sz="1500" dirty="0"/>
+              <a:t>FUTURE WORK</a:t>
+            </a:r>
+          </a:p>
+          <a:p>
+            <a:pPr marL="285750" indent="-285750">
+              <a:buFont typeface="Arial" panose="020B0604020202020204" pitchFamily="34" charset="0"/>
+              <a:buChar char="•"/>
+            </a:pPr>
+            <a:r>
+              <a:rPr lang="en-US" sz="1500" dirty="0"/>
+              <a:t>A bigger and more diverse evaluation set with human raters.</a:t>
+            </a:r>
+          </a:p>
+          <a:p>
+            <a:pPr marL="285750" indent="-285750">
+              <a:buFont typeface="Arial" panose="020B0604020202020204" pitchFamily="34" charset="0"/>
+              <a:buChar char="•"/>
+            </a:pPr>
+            <a:r>
+              <a:rPr lang="en-US" sz="1500" dirty="0"/>
+              <a:t>OCR fallback (</a:t>
+            </a:r>
+            <a:r>
+              <a:rPr lang="en-US" sz="1500" dirty="0" err="1"/>
+              <a:t>ocrmypdf</a:t>
+            </a:r>
+            <a:r>
+              <a:rPr lang="en-US" sz="1500" dirty="0"/>
+              <a:t>) so scanned PDFs aren't silently skipped</a:t>
+            </a:r>
+          </a:p>
+          <a:p>
+            <a:pPr marL="285750" indent="-285750">
+              <a:buFont typeface="Arial" panose="020B0604020202020204" pitchFamily="34" charset="0"/>
+              <a:buChar char="•"/>
+            </a:pPr>
+            <a:r>
+              <a:rPr lang="en-US" sz="1500" dirty="0"/>
+              <a:t>Improve Answer Quality by adding a re-ranker after retrieval (Hit@1 is 68%, Hit@3 is 92% — the right chunk is usually retrieved, just not first)</a:t>
             </a:r>
           </a:p>
         </p:txBody>
@@ -6580,44 +8006,44 @@
         <a:sysClr val="window" lastClr="FFFFFF"/>
       </a:lt1>
       <a:dk2>
-        <a:srgbClr val="1F497D"/>
+        <a:srgbClr val="0E2841"/>
       </a:dk2>
       <a:lt2>
-        <a:srgbClr val="EEECE1"/>
+        <a:srgbClr val="E8E8E8"/>
       </a:lt2>
       <a:accent1>
-        <a:srgbClr val="4F81BD"/>
+        <a:srgbClr val="156082"/>
       </a:accent1>
       <a:accent2>
-        <a:srgbClr val="C0504D"/>
+        <a:srgbClr val="E97132"/>
       </a:accent2>
       <a:accent3>
-        <a:srgbClr val="9BBB59"/>
+        <a:srgbClr val="196B24"/>
       </a:accent3>
       <a:accent4>
-        <a:srgbClr val="8064A2"/>
+        <a:srgbClr val="0F9ED5"/>
       </a:accent4>
       <a:accent5>
-        <a:srgbClr val="4BACC6"/>
+        <a:srgbClr val="A02B93"/>
       </a:accent5>
       <a:accent6>
-        <a:srgbClr val="F79646"/>
+        <a:srgbClr val="4EA72E"/>
       </a:accent6>
       <a:hlink>
-        <a:srgbClr val="0000FF"/>
+        <a:srgbClr val="467886"/>
       </a:hlink>
       <a:folHlink>
-        <a:srgbClr val="800080"/>
+        <a:srgbClr val="96607D"/>
       </a:folHlink>
     </a:clrScheme>
     <a:fontScheme name="Office">
       <a:majorFont>
-        <a:latin typeface="Calibri"/>
+        <a:latin typeface="Aptos Display" panose="02110004020202020204"/>
         <a:ea typeface=""/>
         <a:cs typeface=""/>
-        <a:font script="Jpan" typeface="ＭＳ Ｐゴシック"/>
+        <a:font script="Jpan" typeface="游ゴシック Light"/>
         <a:font script="Hang" typeface="맑은 고딕"/>
-        <a:font script="Hans" typeface="宋体"/>
+        <a:font script="Hans" typeface="等线 Light"/>
         <a:font script="Hant" typeface="新細明體"/>
         <a:font script="Arab" typeface="Times New Roman"/>
         <a:font script="Hebr" typeface="Times New Roman"/>
@@ -6645,14 +8071,31 @@
         <a:font script="Viet" typeface="Times New Roman"/>
         <a:font script="Uigh" typeface="Microsoft Uighur"/>
         <a:font script="Geor" typeface="Sylfaen"/>
+        <a:font script="Armn" typeface="Arial"/>
+        <a:font script="Bugi" typeface="Leelawadee UI"/>
+        <a:font script="Bopo" typeface="Microsoft JhengHei"/>
+        <a:font script="Java" typeface="Javanese Text"/>
+        <a:font script="Lisu" typeface="Segoe UI"/>
+        <a:font script="Mymr" typeface="Myanmar Text"/>
+        <a:font script="Nkoo" typeface="Ebrima"/>
+        <a:font script="Olck" typeface="Nirmala UI"/>
+        <a:font script="Osma" typeface="Ebrima"/>
+        <a:font script="Phag" typeface="Phagspa"/>
+        <a:font script="Syrn" typeface="Estrangelo Edessa"/>
+        <a:font script="Syrj" typeface="Estrangelo Edessa"/>
+        <a:font script="Syre" typeface="Estrangelo Edessa"/>
+        <a:font script="Sora" typeface="Nirmala UI"/>
+        <a:font script="Tale" typeface="Microsoft Tai Le"/>
+        <a:font script="Talu" typeface="Microsoft New Tai Lue"/>
+        <a:font script="Tfng" typeface="Ebrima"/>
       </a:majorFont>
       <a:minorFont>
-        <a:latin typeface="Calibri"/>
+        <a:latin typeface="Aptos" panose="02110004020202020204"/>
         <a:ea typeface=""/>
         <a:cs typeface=""/>
-        <a:font script="Jpan" typeface="ＭＳ Ｐゴシック"/>
+        <a:font script="Jpan" typeface="游ゴシック"/>
         <a:font script="Hang" typeface="맑은 고딕"/>
-        <a:font script="Hans" typeface="宋体"/>
+        <a:font script="Hans" typeface="等线"/>
         <a:font script="Hant" typeface="新細明體"/>
         <a:font script="Arab" typeface="Arial"/>
         <a:font script="Hebr" typeface="Arial"/>
@@ -6680,6 +8123,23 @@
         <a:font script="Viet" typeface="Arial"/>
         <a:font script="Uigh" typeface="Microsoft Uighur"/>
         <a:font script="Geor" typeface="Sylfaen"/>
+        <a:font script="Armn" typeface="Arial"/>
+        <a:font script="Bugi" typeface="Leelawadee UI"/>
+        <a:font script="Bopo" typeface="Microsoft JhengHei"/>
+        <a:font script="Java" typeface="Javanese Text"/>
+        <a:font script="Lisu" typeface="Segoe UI"/>
+        <a:font script="Mymr" typeface="Myanmar Text"/>
+        <a:font script="Nkoo" typeface="Ebrima"/>
+        <a:font script="Olck" typeface="Nirmala UI"/>
+        <a:font script="Osma" typeface="Ebrima"/>
+        <a:font script="Phag" typeface="Phagspa"/>
+        <a:font script="Syrn" typeface="Estrangelo Edessa"/>
+        <a:font script="Syrj" typeface="Estrangelo Edessa"/>
+        <a:font script="Syre" typeface="Estrangelo Edessa"/>
+        <a:font script="Sora" typeface="Nirmala UI"/>
+        <a:font script="Tale" typeface="Microsoft Tai Le"/>
+        <a:font script="Talu" typeface="Microsoft New Tai Lue"/>
+        <a:font script="Tfng" typeface="Ebrima"/>
       </a:minorFont>
     </a:fontScheme>
     <a:fmtScheme name="Office">
@@ -6691,180 +8151,136 @@
           <a:gsLst>
             <a:gs pos="0">
               <a:schemeClr val="phClr">
-                <a:tint val="50000"/>
-                <a:satMod val="300000"/>
+                <a:lumMod val="110000"/>
+                <a:satMod val="105000"/>
+                <a:tint val="67000"/>
               </a:schemeClr>
             </a:gs>
-            <a:gs pos="35000">
+            <a:gs pos="50000">
               <a:schemeClr val="phClr">
-                <a:tint val="37000"/>
-                <a:satMod val="300000"/>
+                <a:lumMod val="105000"/>
+                <a:satMod val="103000"/>
+                <a:tint val="73000"/>
               </a:schemeClr>
             </a:gs>
             <a:gs pos="100000">
               <a:schemeClr val="phClr">
-                <a:tint val="15000"/>
-                <a:satMod val="350000"/>
+                <a:lumMod val="105000"/>
+                <a:satMod val="109000"/>
+                <a:tint val="81000"/>
               </a:schemeClr>
             </a:gs>
           </a:gsLst>
-          <a:lin ang="16200000" scaled="1"/>
+          <a:lin ang="5400000" scaled="0"/>
         </a:gradFill>
         <a:gradFill rotWithShape="1">
           <a:gsLst>
             <a:gs pos="0">
               <a:schemeClr val="phClr">
-                <a:tint val="100000"/>
+                <a:satMod val="103000"/>
+                <a:lumMod val="102000"/>
+                <a:tint val="94000"/>
+              </a:schemeClr>
+            </a:gs>
+            <a:gs pos="50000">
+              <a:schemeClr val="phClr">
+                <a:satMod val="110000"/>
+                <a:lumMod val="100000"/>
                 <a:shade val="100000"/>
-                <a:satMod val="130000"/>
               </a:schemeClr>
             </a:gs>
             <a:gs pos="100000">
               <a:schemeClr val="phClr">
-                <a:tint val="50000"/>
-                <a:shade val="100000"/>
-                <a:satMod val="350000"/>
+                <a:lumMod val="99000"/>
+                <a:satMod val="120000"/>
+                <a:shade val="78000"/>
               </a:schemeClr>
             </a:gs>
           </a:gsLst>
-          <a:lin ang="16200000" scaled="0"/>
+          <a:lin ang="5400000" scaled="0"/>
         </a:gradFill>
       </a:fillStyleLst>
       <a:lnStyleLst>
-        <a:ln w="9525" cap="flat" cmpd="sng" algn="ctr">
+        <a:ln w="12700" cap="flat" cmpd="sng" algn="ctr">
           <a:solidFill>
-            <a:schemeClr val="phClr">
-              <a:shade val="95000"/>
-              <a:satMod val="105000"/>
-            </a:schemeClr>
+            <a:schemeClr val="phClr"/>
           </a:solidFill>
           <a:prstDash val="solid"/>
+          <a:miter lim="800000"/>
+        </a:ln>
+        <a:ln w="19050" cap="flat" cmpd="sng" algn="ctr">
+          <a:solidFill>
+            <a:schemeClr val="phClr"/>
+          </a:solidFill>
+          <a:prstDash val="solid"/>
+          <a:miter lim="800000"/>
         </a:ln>
         <a:ln w="25400" cap="flat" cmpd="sng" algn="ctr">
           <a:solidFill>
             <a:schemeClr val="phClr"/>
           </a:solidFill>
           <a:prstDash val="solid"/>
-        </a:ln>
-        <a:ln w="38100" cap="flat" cmpd="sng" algn="ctr">
-          <a:solidFill>
-            <a:schemeClr val="phClr"/>
-          </a:solidFill>
-          <a:prstDash val="solid"/>
+          <a:miter lim="800000"/>
         </a:ln>
       </a:lnStyleLst>
       <a:effectStyleLst>
         <a:effectStyle>
+          <a:effectLst/>
+        </a:effectStyle>
+        <a:effectStyle>
+          <a:effectLst/>
+        </a:effectStyle>
+        <a:effectStyle>
           <a:effectLst>
-            <a:outerShdw blurRad="40000" dist="20000" dir="5400000" rotWithShape="0">
+            <a:outerShdw blurRad="57150" dist="19050" dir="5400000" algn="ctr" rotWithShape="0">
               <a:srgbClr val="000000">
-                <a:alpha val="38000"/>
+                <a:alpha val="63000"/>
               </a:srgbClr>
             </a:outerShdw>
           </a:effectLst>
-        </a:effectStyle>
-        <a:effectStyle>
-          <a:effectLst>
-            <a:outerShdw blurRad="40000" dist="23000" dir="5400000" rotWithShape="0">
-              <a:srgbClr val="000000">
-                <a:alpha val="35000"/>
-              </a:srgbClr>
-            </a:outerShdw>
-          </a:effectLst>
-        </a:effectStyle>
-        <a:effectStyle>
-          <a:effectLst>
-            <a:outerShdw blurRad="40000" dist="23000" dir="5400000" rotWithShape="0">
-              <a:srgbClr val="000000">
-                <a:alpha val="35000"/>
-              </a:srgbClr>
-            </a:outerShdw>
-          </a:effectLst>
-          <a:scene3d>
-            <a:camera prst="orthographicFront">
-              <a:rot lat="0" lon="0" rev="0"/>
-            </a:camera>
-            <a:lightRig rig="threePt" dir="t">
-              <a:rot lat="0" lon="0" rev="1200000"/>
-            </a:lightRig>
-          </a:scene3d>
-          <a:sp3d>
-            <a:bevelT w="63500" h="25400"/>
-          </a:sp3d>
         </a:effectStyle>
       </a:effectStyleLst>
       <a:bgFillStyleLst>
         <a:solidFill>
           <a:schemeClr val="phClr"/>
         </a:solidFill>
+        <a:solidFill>
+          <a:schemeClr val="phClr">
+            <a:tint val="95000"/>
+            <a:satMod val="170000"/>
+          </a:schemeClr>
+        </a:solidFill>
         <a:gradFill rotWithShape="1">
           <a:gsLst>
             <a:gs pos="0">
               <a:schemeClr val="phClr">
-                <a:tint val="40000"/>
-                <a:satMod val="350000"/>
+                <a:tint val="93000"/>
+                <a:satMod val="150000"/>
+                <a:shade val="98000"/>
+                <a:lumMod val="102000"/>
               </a:schemeClr>
             </a:gs>
-            <a:gs pos="40000">
+            <a:gs pos="50000">
               <a:schemeClr val="phClr">
-                <a:tint val="45000"/>
-                <a:shade val="99000"/>
-                <a:satMod val="350000"/>
+                <a:tint val="98000"/>
+                <a:satMod val="130000"/>
+                <a:shade val="90000"/>
+                <a:lumMod val="103000"/>
               </a:schemeClr>
             </a:gs>
             <a:gs pos="100000">
               <a:schemeClr val="phClr">
-                <a:shade val="20000"/>
-                <a:satMod val="255000"/>
+                <a:shade val="63000"/>
+                <a:satMod val="120000"/>
               </a:schemeClr>
             </a:gs>
           </a:gsLst>
-          <a:path path="circle">
-            <a:fillToRect l="50000" t="-80000" r="50000" b="180000"/>
-          </a:path>
-        </a:gradFill>
-        <a:gradFill rotWithShape="1">
-          <a:gsLst>
-            <a:gs pos="0">
-              <a:schemeClr val="phClr">
-                <a:tint val="80000"/>
-                <a:satMod val="300000"/>
-              </a:schemeClr>
-            </a:gs>
-            <a:gs pos="100000">
-              <a:schemeClr val="phClr">
-                <a:shade val="30000"/>
-                <a:satMod val="200000"/>
-              </a:schemeClr>
-            </a:gs>
-          </a:gsLst>
-          <a:path path="circle">
-            <a:fillToRect l="50000" t="50000" r="50000" b="50000"/>
-          </a:path>
+          <a:lin ang="5400000" scaled="0"/>
         </a:gradFill>
       </a:bgFillStyleLst>
     </a:fmtScheme>
   </a:themeElements>
   <a:objectDefaults>
-    <a:spDef>
-      <a:spPr/>
-      <a:bodyPr/>
-      <a:lstStyle/>
-      <a:style>
-        <a:lnRef idx="1">
-          <a:schemeClr val="accent1"/>
-        </a:lnRef>
-        <a:fillRef idx="3">
-          <a:schemeClr val="accent1"/>
-        </a:fillRef>
-        <a:effectRef idx="2">
-          <a:schemeClr val="accent1"/>
-        </a:effectRef>
-        <a:fontRef idx="minor">
-          <a:schemeClr val="lt1"/>
-        </a:fontRef>
-      </a:style>
-    </a:spDef>
     <a:lnDef>
       <a:spPr/>
       <a:bodyPr/>
@@ -6886,5 +8302,10 @@
     </a:lnDef>
   </a:objectDefaults>
   <a:extraClrSchemeLst/>
+  <a:extLst>
+    <a:ext uri="{05A4C25C-085E-4340-85A3-A5531E510DB2}">
+      <thm15:themeFamily xmlns:thm15="http://schemas.microsoft.com/office/thememl/2012/main" name="Office Theme" id="{2E142A2C-CD16-42D6-873A-C26D2A0506FA}" vid="{1BDDFF52-6CD6-40A5-AB3C-68EB2F1E4D0A}"/>
+    </a:ext>
+  </a:extLst>
 </a:theme>
 </file>
--- a/reports/Final_Project_Presentation.pptx
+++ b/reports/Final_Project_Presentation.pptx
@@ -782,23 +782,7 @@
           </a:p>
           <a:p>
             <a:r>
-              <a:t>SAY (LoRA): 'For fine-tuning, we ran a real LoRA experiment, not just a placeholder. We took FLAN-T5-small, FROZE the entire base model, and trained a tiny adapter — about 1.3 megabytes of weights — on just the query and value attention layers, using 99 question-answer pairs we generated from our own PDFs. The whole thing trains in a few minutes on a Mac CPU, and the held-out Jaccard score went up to roughly 0.68, so the adapter actually learned the document style.'</a:t>
-            </a:r>
-          </a:p>
-          <a:p>
-            <a:endParaRPr/>
-          </a:p>
-          <a:p>
-            <a:r>
-              <a:t>SAY (QLoRA): 'We also wired in QLoRA as an OPTIONAL path. QLoRA needs an NVIDIA GPU and the bitsandbytes library, neither of which exist on a Mac, so the app exposes it as a one-click readiness check that correctly reports "not available" on this machine. The actual experiment we run end-to-end is plain LoRA.'</a:t>
-            </a:r>
-          </a:p>
-          <a:p>
-            <a:endParaRPr/>
-          </a:p>
-          <a:p>
-            <a:r>
-              <a:t>SAY (engineering): 'Three pragmatic choices worth flagging. One — every LLM call uses low temperature (0.1) and a tight prompt to keep cost and rate limits in check. Two — training and indexing are CPU-only, no GPU required. And three — every index we build ships with a manifest.json that records the embedding model and chunk settings; if a teammate switches the embedding model in the sidebar, the app detects the mismatch and CLEARS the stale index automatically — that prevents the silent failure of querying with one model while the index was built with another.'</a:t>
+              <a:t>SAY: 'For the LoRA experiment, we attach a PEFT adapter to just the query and value attention matrices of FLAN-T5-small — that is about 1.4 megabytes of weights — and we keep the base model frozen. QLoRA is wired in but it requires CUDA and bitsandbytes; on a Mac the honest answer is that LoRA is the practical local option.'</a:t>
             </a:r>
           </a:p>
         </p:txBody>
@@ -6731,6 +6715,7 @@
               </a:defRPr>
             </a:pPr>
             <a:r>
+              <a:rPr dirty="0"/>
               <a:t>Methods — Choices, Rationale &amp; Constraints</a:t>
             </a:r>
           </a:p>
@@ -6745,7 +6730,7 @@
         <p:spPr>
           <a:xfrm>
             <a:off x="457200" y="1097280"/>
-            <a:ext cx="11247120" cy="5212080"/>
+            <a:ext cx="11247120" cy="2369880"/>
           </a:xfrm>
           <a:prstGeom prst="rect">
             <a:avLst/>
@@ -6762,14 +6747,31 @@
               <a:spcAft>
                 <a:spcPts val="800"/>
               </a:spcAft>
-              <a:defRPr sz="1500">
+              <a:defRPr sz="1600">
                 <a:solidFill>
                   <a:srgbClr val="222222"/>
                 </a:solidFill>
               </a:defRPr>
             </a:pPr>
             <a:r>
-              <a:t>Embedding model: all-MiniLM-L6-v2 default (small, fast, ~90 MB). Sidebar dropdown lets us swap to BGE-small, MPNet, or Arctic-xs and rebuild.</a:t>
+              <a:rPr dirty="0"/>
+              <a:t>Embedding model: all-MiniLM-L6-v2 default (small, fast, free, ~90 MB). Sidebar dropdown lets us swap to BGE-small, </a:t>
+            </a:r>
+            <a:r>
+              <a:rPr dirty="0" err="1"/>
+              <a:t>MPNet</a:t>
+            </a:r>
+            <a:r>
+              <a:rPr dirty="0"/>
+              <a:t>, or Arctic-</a:t>
+            </a:r>
+            <a:r>
+              <a:rPr dirty="0" err="1"/>
+              <a:t>xs</a:t>
+            </a:r>
+            <a:r>
+              <a:rPr dirty="0"/>
+              <a:t> and rebuild.</a:t>
             </a:r>
           </a:p>
           <a:p>
@@ -6777,14 +6779,31 @@
               <a:spcAft>
                 <a:spcPts val="800"/>
               </a:spcAft>
-              <a:defRPr sz="1500">
+              <a:defRPr sz="1600">
                 <a:solidFill>
                   <a:srgbClr val="222222"/>
                 </a:solidFill>
               </a:defRPr>
             </a:pPr>
             <a:r>
-              <a:t>Hybrid retrieval: final_score = α · dense + (1 − α) · BM25, default α = 0.65. Lets exact course terms ("Week 3") and paraphrases reinforce each other.</a:t>
+              <a:rPr dirty="0"/>
+              <a:t>Hybrid retrieval: </a:t>
+            </a:r>
+            <a:r>
+              <a:rPr dirty="0" err="1"/>
+              <a:t>final_score</a:t>
+            </a:r>
+            <a:r>
+              <a:rPr dirty="0"/>
+              <a:t> = α · </a:t>
+            </a:r>
+            <a:r>
+              <a:rPr dirty="0" err="1"/>
+              <a:t>dense_score</a:t>
+            </a:r>
+            <a:r>
+              <a:rPr dirty="0"/>
+              <a:t> + (1 − α) · BM25, default α=0.65. Helps exact course terms (e.g. "Week 3") and paraphrases reinforce each other.</a:t>
             </a:r>
           </a:p>
           <a:p>
@@ -6792,14 +6811,31 @@
               <a:spcAft>
                 <a:spcPts val="800"/>
               </a:spcAft>
-              <a:defRPr sz="1500">
+              <a:defRPr sz="1600">
                 <a:solidFill>
                   <a:srgbClr val="222222"/>
                 </a:solidFill>
               </a:defRPr>
             </a:pPr>
             <a:r>
-              <a:t>Strict grounded prompt: "answer ONLY from this context, refuse otherwise, cite [filename p.PAGE]". The exact refusal sentence flips the grounded_or_not flag automatically.</a:t>
+              <a:rPr dirty="0"/>
+              <a:t>Strict grounded prompt: "answer ONLY from this context, refuse otherwise, cite [filename </a:t>
+            </a:r>
+            <a:r>
+              <a:rPr dirty="0" err="1"/>
+              <a:t>p.PAGE</a:t>
+            </a:r>
+            <a:r>
+              <a:rPr dirty="0"/>
+              <a:t>]". The exact refusal sentence is detected to flip the </a:t>
+            </a:r>
+            <a:r>
+              <a:rPr dirty="0" err="1"/>
+              <a:t>grounded_or_not</a:t>
+            </a:r>
+            <a:r>
+              <a:rPr dirty="0"/>
+              <a:t> flag.</a:t>
             </a:r>
           </a:p>
           <a:p>
@@ -6807,44 +6843,19 @@
               <a:spcAft>
                 <a:spcPts val="800"/>
               </a:spcAft>
-              <a:defRPr sz="1500">
+              <a:defRPr sz="1600">
                 <a:solidFill>
                   <a:srgbClr val="222222"/>
                 </a:solidFill>
               </a:defRPr>
             </a:pPr>
             <a:r>
-              <a:t>LoRA fine-tune of FLAN-T5-small: base model stays frozen; we train only a 1.3 MB rank-8 patch on the q/v attention layers — 99 auto-generated Q&amp;A pairs, 3 epochs, runs on Mac CPU.</a:t>
-            </a:r>
-          </a:p>
-          <a:p>
-            <a:pPr>
-              <a:spcAft>
-                <a:spcPts val="800"/>
-              </a:spcAft>
-              <a:defRPr sz="1500">
-                <a:solidFill>
-                  <a:srgbClr val="222222"/>
-                </a:solidFill>
-              </a:defRPr>
-            </a:pPr>
-            <a:r>
-              <a:t>QLoRA: optional GPU-only path exposed as a readiness check. On Mac it correctly reports "not ready" (no CUDA / bitsandbytes), which is why LoRA is the path we actually run end-to-end.</a:t>
-            </a:r>
-          </a:p>
-          <a:p>
-            <a:pPr>
-              <a:spcAft>
-                <a:spcPts val="800"/>
-              </a:spcAft>
-              <a:defRPr sz="1500">
-                <a:solidFill>
-                  <a:srgbClr val="222222"/>
-                </a:solidFill>
-              </a:defRPr>
-            </a:pPr>
-            <a:r>
-              <a:t>Engineering trade-offs: low temperature (0.1) + tight prompts to control cost; CPU-only training and indexing; every index ships with a manifest.json so swapping the embedding model auto-clears the stale index.</a:t>
+              <a:rPr dirty="0" err="1"/>
+              <a:t>LoRA</a:t>
+            </a:r>
+            <a:r>
+              <a:rPr dirty="0"/>
+              <a:t> experiment: PEFT adapter on the q/v attention modules of FLAN-T5-small (rank 8, α 16, dropout 0.05). Only ~1.4 MB of weights are trained — base model stays frozen.</a:t>
             </a:r>
           </a:p>
         </p:txBody>
